--- a/SuperPlane-Software-Factory.pptx
+++ b/SuperPlane-Software-Factory.pptx
@@ -1480,7 +1480,7 @@
     <p:bg>
       <p:bgPr>
         <a:solidFill>
-          <a:srgbClr val="0F1729"/>
+          <a:srgbClr val="0A0F1E"/>
         </a:solidFill>
       </p:bgPr>
     </p:bg>
@@ -1498,16 +1498,40 @@
           <a:chExt cx="0" cy="0"/>
         </a:xfrm>
       </p:grpSpPr>
-      <p:sp>
-        <p:nvSpPr>
-          <p:cNvPr id="2" name="Text 0"/>
-          <p:cNvSpPr/>
-          <p:nvPr/>
-        </p:nvSpPr>
-        <p:spPr>
-          <a:xfrm>
-            <a:off x="640080" y="640080"/>
-            <a:ext cx="10058400" cy="274320"/>
+      <p:pic>
+        <p:nvPicPr>
+          <p:cNvPr id="2" name="Image 0" descr="/tmp/cubiczan-logo.png">    </p:cNvPr>
+          <p:cNvPicPr>
+            <a:picLocks noChangeAspect="1"/>
+          </p:cNvPicPr>
+          <p:nvPr/>
+        </p:nvPicPr>
+        <p:blipFill>
+          <a:blip r:embed="rId1"/>
+          <a:stretch>
+            <a:fillRect/>
+          </a:stretch>
+        </p:blipFill>
+        <p:spPr>
+          <a:xfrm>
+            <a:off x="640080" y="457200"/>
+            <a:ext cx="2240280" cy="1298448"/>
+          </a:xfrm>
+          <a:prstGeom prst="rect">
+            <a:avLst/>
+          </a:prstGeom>
+        </p:spPr>
+      </p:pic>
+      <p:sp>
+        <p:nvSpPr>
+          <p:cNvPr id="3" name="Text 0"/>
+          <p:cNvSpPr/>
+          <p:nvPr/>
+        </p:nvSpPr>
+        <p:spPr>
+          <a:xfrm>
+            <a:off x="640080" y="1965960"/>
+            <a:ext cx="10515600" cy="274320"/>
           </a:xfrm>
           <a:prstGeom prst="rect">
             <a:avLst/>
@@ -1525,7 +1549,7 @@
             <a:r>
               <a:rPr lang="en-US" sz="1200" b="1" spc="200" kern="0" dirty="0">
                 <a:solidFill>
-                  <a:srgbClr val="14B8A6"/>
+                  <a:srgbClr val="008AFC"/>
                 </a:solidFill>
                 <a:latin typeface="Calibri" pitchFamily="34" charset="0"/>
                 <a:ea typeface="Calibri" pitchFamily="34" charset="-122"/>
@@ -1539,30 +1563,30 @@
       </p:sp>
       <p:sp>
         <p:nvSpPr>
-          <p:cNvPr id="3" name="Text 1"/>
-          <p:cNvSpPr/>
-          <p:nvPr/>
-        </p:nvSpPr>
-        <p:spPr>
-          <a:xfrm>
-            <a:off x="640080" y="1051560"/>
-            <a:ext cx="10972800" cy="914400"/>
-          </a:xfrm>
-          <a:prstGeom prst="rect">
-            <a:avLst/>
-          </a:prstGeom>
-          <a:noFill/>
-          <a:ln/>
-        </p:spPr>
-        <p:txBody>
-          <a:bodyPr wrap="square" rtlCol="0" anchor="ctr"/>
-          <a:lstStyle/>
-          <a:p>
-            <a:pPr indent="0" marL="0">
-              <a:buNone/>
-            </a:pPr>
-            <a:r>
-              <a:rPr lang="en-US" sz="4600" b="1" dirty="0">
+          <p:cNvPr id="4" name="Text 1"/>
+          <p:cNvSpPr/>
+          <p:nvPr/>
+        </p:nvSpPr>
+        <p:spPr>
+          <a:xfrm>
+            <a:off x="640080" y="2286000"/>
+            <a:ext cx="10972800" cy="868680"/>
+          </a:xfrm>
+          <a:prstGeom prst="rect">
+            <a:avLst/>
+          </a:prstGeom>
+          <a:noFill/>
+          <a:ln/>
+        </p:spPr>
+        <p:txBody>
+          <a:bodyPr wrap="square" rtlCol="0" anchor="ctr"/>
+          <a:lstStyle/>
+          <a:p>
+            <a:pPr indent="0" marL="0">
+              <a:buNone/>
+            </a:pPr>
+            <a:r>
+              <a:rPr lang="en-US" sz="4400" b="1" dirty="0">
                 <a:solidFill>
                   <a:srgbClr val="FFFFFF"/>
                 </a:solidFill>
@@ -1572,19 +1596,19 @@
               </a:rPr>
               <a:t>SuperPlane Software Factory</a:t>
             </a:r>
-            <a:endParaRPr lang="en-US" sz="4600" dirty="0"/>
-          </a:p>
-        </p:txBody>
-      </p:sp>
-      <p:sp>
-        <p:nvSpPr>
-          <p:cNvPr id="4" name="Text 2"/>
-          <p:cNvSpPr/>
-          <p:nvPr/>
-        </p:nvSpPr>
-        <p:spPr>
-          <a:xfrm>
-            <a:off x="640080" y="1965960"/>
+            <a:endParaRPr lang="en-US" sz="4400" dirty="0"/>
+          </a:p>
+        </p:txBody>
+      </p:sp>
+      <p:sp>
+        <p:nvSpPr>
+          <p:cNvPr id="5" name="Text 2"/>
+          <p:cNvSpPr/>
+          <p:nvPr/>
+        </p:nvSpPr>
+        <p:spPr>
+          <a:xfrm>
+            <a:off x="640080" y="3154680"/>
             <a:ext cx="10972800" cy="457200"/>
           </a:xfrm>
           <a:prstGeom prst="rect">
@@ -1601,7 +1625,7 @@
               <a:buNone/>
             </a:pPr>
             <a:r>
-              <a:rPr lang="en-US" sz="2000" dirty="0">
+              <a:rPr lang="en-US" sz="1900" dirty="0">
                 <a:solidFill>
                   <a:srgbClr val="CADCFC"/>
                 </a:solidFill>
@@ -1611,20 +1635,20 @@
               </a:rPr>
               <a:t>A vague idea or GitHub issue in — a working, security-gated PoC out.</a:t>
             </a:r>
-            <a:endParaRPr lang="en-US" sz="2000" dirty="0"/>
-          </a:p>
-        </p:txBody>
-      </p:sp>
-      <p:sp>
-        <p:nvSpPr>
-          <p:cNvPr id="5" name="Shape 3"/>
-          <p:cNvSpPr/>
-          <p:nvPr/>
-        </p:nvSpPr>
-        <p:spPr>
-          <a:xfrm>
-            <a:off x="640080" y="2697480"/>
-            <a:ext cx="1581912" cy="457200"/>
+            <a:endParaRPr lang="en-US" sz="1900" dirty="0"/>
+          </a:p>
+        </p:txBody>
+      </p:sp>
+      <p:sp>
+        <p:nvSpPr>
+          <p:cNvPr id="6" name="Shape 3"/>
+          <p:cNvSpPr/>
+          <p:nvPr/>
+        </p:nvSpPr>
+        <p:spPr>
+          <a:xfrm>
+            <a:off x="640080" y="3840480"/>
+            <a:ext cx="1581912" cy="438912"/>
           </a:xfrm>
           <a:prstGeom prst="roundRect">
             <a:avLst>
@@ -1632,11 +1656,11 @@
             </a:avLst>
           </a:prstGeom>
           <a:solidFill>
-            <a:srgbClr val="1B2742"/>
+            <a:srgbClr val="161D33"/>
           </a:solidFill>
           <a:ln w="12700">
             <a:solidFill>
-              <a:srgbClr val="0E7C86"/>
+              <a:srgbClr val="008AFC"/>
             </a:solidFill>
             <a:prstDash val="solid"/>
           </a:ln>
@@ -1644,14 +1668,14 @@
       </p:sp>
       <p:sp>
         <p:nvSpPr>
-          <p:cNvPr id="6" name="Text 4"/>
-          <p:cNvSpPr/>
-          <p:nvPr/>
-        </p:nvSpPr>
-        <p:spPr>
-          <a:xfrm>
-            <a:off x="640080" y="2697480"/>
-            <a:ext cx="1581912" cy="457200"/>
+          <p:cNvPr id="7" name="Text 4"/>
+          <p:cNvSpPr/>
+          <p:nvPr/>
+        </p:nvSpPr>
+        <p:spPr>
+          <a:xfrm>
+            <a:off x="640080" y="3840480"/>
+            <a:ext cx="1581912" cy="438912"/>
           </a:xfrm>
           <a:prstGeom prst="rect">
             <a:avLst/>
@@ -1667,9 +1691,9 @@
               <a:buNone/>
             </a:pPr>
             <a:r>
-              <a:rPr lang="en-US" sz="1250" b="1" dirty="0">
-                <a:solidFill>
-                  <a:srgbClr val="14B8A6"/>
+              <a:rPr lang="en-US" sz="1200" b="1" dirty="0">
+                <a:solidFill>
+                  <a:srgbClr val="008AFC"/>
                 </a:solidFill>
                 <a:latin typeface="Calibri" pitchFamily="34" charset="0"/>
                 <a:ea typeface="Calibri" pitchFamily="34" charset="-122"/>
@@ -1677,20 +1701,20 @@
               </a:rPr>
               <a:t>Idea / Issue</a:t>
             </a:r>
-            <a:endParaRPr lang="en-US" sz="1250" dirty="0"/>
-          </a:p>
-        </p:txBody>
-      </p:sp>
-      <p:sp>
-        <p:nvSpPr>
-          <p:cNvPr id="7" name="Text 5"/>
-          <p:cNvSpPr/>
-          <p:nvPr/>
-        </p:nvSpPr>
-        <p:spPr>
-          <a:xfrm>
-            <a:off x="2249424" y="2697480"/>
-            <a:ext cx="274320" cy="457200"/>
+            <a:endParaRPr lang="en-US" sz="1200" dirty="0"/>
+          </a:p>
+        </p:txBody>
+      </p:sp>
+      <p:sp>
+        <p:nvSpPr>
+          <p:cNvPr id="8" name="Text 5"/>
+          <p:cNvSpPr/>
+          <p:nvPr/>
+        </p:nvSpPr>
+        <p:spPr>
+          <a:xfrm>
+            <a:off x="2249424" y="3840480"/>
+            <a:ext cx="256032" cy="438912"/>
           </a:xfrm>
           <a:prstGeom prst="rect">
             <a:avLst/>
@@ -1706,27 +1730,27 @@
               <a:buNone/>
             </a:pPr>
             <a:r>
-              <a:rPr lang="en-US" sz="1400" dirty="0">
+              <a:rPr lang="en-US" sz="1300" dirty="0">
                 <a:solidFill>
                   <a:srgbClr val="5B6B86"/>
                 </a:solidFill>
               </a:rPr>
               <a:t>→</a:t>
             </a:r>
-            <a:endParaRPr lang="en-US" sz="1400" dirty="0"/>
-          </a:p>
-        </p:txBody>
-      </p:sp>
-      <p:sp>
-        <p:nvSpPr>
-          <p:cNvPr id="8" name="Shape 6"/>
-          <p:cNvSpPr/>
-          <p:nvPr/>
-        </p:nvSpPr>
-        <p:spPr>
-          <a:xfrm>
-            <a:off x="2542032" y="2697480"/>
-            <a:ext cx="1161288" cy="457200"/>
+            <a:endParaRPr lang="en-US" sz="1300" dirty="0"/>
+          </a:p>
+        </p:txBody>
+      </p:sp>
+      <p:sp>
+        <p:nvSpPr>
+          <p:cNvPr id="9" name="Shape 6"/>
+          <p:cNvSpPr/>
+          <p:nvPr/>
+        </p:nvSpPr>
+        <p:spPr>
+          <a:xfrm>
+            <a:off x="2523744" y="3840480"/>
+            <a:ext cx="1161288" cy="438912"/>
           </a:xfrm>
           <a:prstGeom prst="roundRect">
             <a:avLst>
@@ -1734,11 +1758,11 @@
             </a:avLst>
           </a:prstGeom>
           <a:solidFill>
-            <a:srgbClr val="1B2742"/>
+            <a:srgbClr val="161D33"/>
           </a:solidFill>
           <a:ln w="12700">
             <a:solidFill>
-              <a:srgbClr val="0E7C86"/>
+              <a:srgbClr val="008AFC"/>
             </a:solidFill>
             <a:prstDash val="solid"/>
           </a:ln>
@@ -1746,14 +1770,14 @@
       </p:sp>
       <p:sp>
         <p:nvSpPr>
-          <p:cNvPr id="9" name="Text 7"/>
-          <p:cNvSpPr/>
-          <p:nvPr/>
-        </p:nvSpPr>
-        <p:spPr>
-          <a:xfrm>
-            <a:off x="2542032" y="2697480"/>
-            <a:ext cx="1161288" cy="457200"/>
+          <p:cNvPr id="10" name="Text 7"/>
+          <p:cNvSpPr/>
+          <p:nvPr/>
+        </p:nvSpPr>
+        <p:spPr>
+          <a:xfrm>
+            <a:off x="2523744" y="3840480"/>
+            <a:ext cx="1161288" cy="438912"/>
           </a:xfrm>
           <a:prstGeom prst="rect">
             <a:avLst/>
@@ -1769,9 +1793,9 @@
               <a:buNone/>
             </a:pPr>
             <a:r>
-              <a:rPr lang="en-US" sz="1250" b="1" dirty="0">
-                <a:solidFill>
-                  <a:srgbClr val="14B8A6"/>
+              <a:rPr lang="en-US" sz="1200" b="1" dirty="0">
+                <a:solidFill>
+                  <a:srgbClr val="008AFC"/>
                 </a:solidFill>
                 <a:latin typeface="Calibri" pitchFamily="34" charset="0"/>
                 <a:ea typeface="Calibri" pitchFamily="34" charset="-122"/>
@@ -1779,20 +1803,20 @@
               </a:rPr>
               <a:t>LLM Spec</a:t>
             </a:r>
-            <a:endParaRPr lang="en-US" sz="1250" dirty="0"/>
-          </a:p>
-        </p:txBody>
-      </p:sp>
-      <p:sp>
-        <p:nvSpPr>
-          <p:cNvPr id="10" name="Text 8"/>
-          <p:cNvSpPr/>
-          <p:nvPr/>
-        </p:nvSpPr>
-        <p:spPr>
-          <a:xfrm>
-            <a:off x="3730752" y="2697480"/>
-            <a:ext cx="274320" cy="457200"/>
+            <a:endParaRPr lang="en-US" sz="1200" dirty="0"/>
+          </a:p>
+        </p:txBody>
+      </p:sp>
+      <p:sp>
+        <p:nvSpPr>
+          <p:cNvPr id="11" name="Text 8"/>
+          <p:cNvSpPr/>
+          <p:nvPr/>
+        </p:nvSpPr>
+        <p:spPr>
+          <a:xfrm>
+            <a:off x="3712464" y="3840480"/>
+            <a:ext cx="256032" cy="438912"/>
           </a:xfrm>
           <a:prstGeom prst="rect">
             <a:avLst/>
@@ -1808,27 +1832,27 @@
               <a:buNone/>
             </a:pPr>
             <a:r>
-              <a:rPr lang="en-US" sz="1400" dirty="0">
+              <a:rPr lang="en-US" sz="1300" dirty="0">
                 <a:solidFill>
                   <a:srgbClr val="5B6B86"/>
                 </a:solidFill>
               </a:rPr>
               <a:t>→</a:t>
             </a:r>
-            <a:endParaRPr lang="en-US" sz="1400" dirty="0"/>
-          </a:p>
-        </p:txBody>
-      </p:sp>
-      <p:sp>
-        <p:nvSpPr>
-          <p:cNvPr id="11" name="Shape 9"/>
-          <p:cNvSpPr/>
-          <p:nvPr/>
-        </p:nvSpPr>
-        <p:spPr>
-          <a:xfrm>
-            <a:off x="4023360" y="2697480"/>
-            <a:ext cx="1687068" cy="457200"/>
+            <a:endParaRPr lang="en-US" sz="1300" dirty="0"/>
+          </a:p>
+        </p:txBody>
+      </p:sp>
+      <p:sp>
+        <p:nvSpPr>
+          <p:cNvPr id="12" name="Shape 9"/>
+          <p:cNvSpPr/>
+          <p:nvPr/>
+        </p:nvSpPr>
+        <p:spPr>
+          <a:xfrm>
+            <a:off x="3986784" y="3840480"/>
+            <a:ext cx="1687068" cy="438912"/>
           </a:xfrm>
           <a:prstGeom prst="roundRect">
             <a:avLst>
@@ -1836,11 +1860,11 @@
             </a:avLst>
           </a:prstGeom>
           <a:solidFill>
-            <a:srgbClr val="1B2742"/>
+            <a:srgbClr val="161D33"/>
           </a:solidFill>
           <a:ln w="12700">
             <a:solidFill>
-              <a:srgbClr val="0E7C86"/>
+              <a:srgbClr val="008AFC"/>
             </a:solidFill>
             <a:prstDash val="solid"/>
           </a:ln>
@@ -1848,14 +1872,14 @@
       </p:sp>
       <p:sp>
         <p:nvSpPr>
-          <p:cNvPr id="12" name="Text 10"/>
-          <p:cNvSpPr/>
-          <p:nvPr/>
-        </p:nvSpPr>
-        <p:spPr>
-          <a:xfrm>
-            <a:off x="4023360" y="2697480"/>
-            <a:ext cx="1687068" cy="457200"/>
+          <p:cNvPr id="13" name="Text 10"/>
+          <p:cNvSpPr/>
+          <p:nvPr/>
+        </p:nvSpPr>
+        <p:spPr>
+          <a:xfrm>
+            <a:off x="3986784" y="3840480"/>
+            <a:ext cx="1687068" cy="438912"/>
           </a:xfrm>
           <a:prstGeom prst="rect">
             <a:avLst/>
@@ -1871,9 +1895,9 @@
               <a:buNone/>
             </a:pPr>
             <a:r>
-              <a:rPr lang="en-US" sz="1250" b="1" dirty="0">
-                <a:solidFill>
-                  <a:srgbClr val="14B8A6"/>
+              <a:rPr lang="en-US" sz="1200" b="1" dirty="0">
+                <a:solidFill>
+                  <a:srgbClr val="008AFC"/>
                 </a:solidFill>
                 <a:latin typeface="Calibri" pitchFamily="34" charset="0"/>
                 <a:ea typeface="Calibri" pitchFamily="34" charset="-122"/>
@@ -1881,20 +1905,20 @@
               </a:rPr>
               <a:t>Sandbox Build</a:t>
             </a:r>
-            <a:endParaRPr lang="en-US" sz="1250" dirty="0"/>
-          </a:p>
-        </p:txBody>
-      </p:sp>
-      <p:sp>
-        <p:nvSpPr>
-          <p:cNvPr id="13" name="Text 11"/>
-          <p:cNvSpPr/>
-          <p:nvPr/>
-        </p:nvSpPr>
-        <p:spPr>
-          <a:xfrm>
-            <a:off x="5737860" y="2697480"/>
-            <a:ext cx="274320" cy="457200"/>
+            <a:endParaRPr lang="en-US" sz="1200" dirty="0"/>
+          </a:p>
+        </p:txBody>
+      </p:sp>
+      <p:sp>
+        <p:nvSpPr>
+          <p:cNvPr id="14" name="Text 11"/>
+          <p:cNvSpPr/>
+          <p:nvPr/>
+        </p:nvSpPr>
+        <p:spPr>
+          <a:xfrm>
+            <a:off x="5701284" y="3840480"/>
+            <a:ext cx="256032" cy="438912"/>
           </a:xfrm>
           <a:prstGeom prst="rect">
             <a:avLst/>
@@ -1910,27 +1934,27 @@
               <a:buNone/>
             </a:pPr>
             <a:r>
-              <a:rPr lang="en-US" sz="1400" dirty="0">
+              <a:rPr lang="en-US" sz="1300" dirty="0">
                 <a:solidFill>
                   <a:srgbClr val="5B6B86"/>
                 </a:solidFill>
               </a:rPr>
               <a:t>→</a:t>
             </a:r>
-            <a:endParaRPr lang="en-US" sz="1400" dirty="0"/>
-          </a:p>
-        </p:txBody>
-      </p:sp>
-      <p:sp>
-        <p:nvSpPr>
-          <p:cNvPr id="14" name="Shape 12"/>
-          <p:cNvSpPr/>
-          <p:nvPr/>
-        </p:nvSpPr>
-        <p:spPr>
-          <a:xfrm>
-            <a:off x="6030468" y="2697480"/>
-            <a:ext cx="1581912" cy="457200"/>
+            <a:endParaRPr lang="en-US" sz="1300" dirty="0"/>
+          </a:p>
+        </p:txBody>
+      </p:sp>
+      <p:sp>
+        <p:nvSpPr>
+          <p:cNvPr id="15" name="Shape 12"/>
+          <p:cNvSpPr/>
+          <p:nvPr/>
+        </p:nvSpPr>
+        <p:spPr>
+          <a:xfrm>
+            <a:off x="5975604" y="3840480"/>
+            <a:ext cx="1581912" cy="438912"/>
           </a:xfrm>
           <a:prstGeom prst="roundRect">
             <a:avLst>
@@ -1938,11 +1962,11 @@
             </a:avLst>
           </a:prstGeom>
           <a:solidFill>
-            <a:srgbClr val="1B2742"/>
+            <a:srgbClr val="161D33"/>
           </a:solidFill>
           <a:ln w="12700">
             <a:solidFill>
-              <a:srgbClr val="0E7C86"/>
+              <a:srgbClr val="D97706"/>
             </a:solidFill>
             <a:prstDash val="solid"/>
           </a:ln>
@@ -1950,14 +1974,14 @@
       </p:sp>
       <p:sp>
         <p:nvSpPr>
-          <p:cNvPr id="15" name="Text 13"/>
-          <p:cNvSpPr/>
-          <p:nvPr/>
-        </p:nvSpPr>
-        <p:spPr>
-          <a:xfrm>
-            <a:off x="6030468" y="2697480"/>
-            <a:ext cx="1581912" cy="457200"/>
+          <p:cNvPr id="16" name="Text 13"/>
+          <p:cNvSpPr/>
+          <p:nvPr/>
+        </p:nvSpPr>
+        <p:spPr>
+          <a:xfrm>
+            <a:off x="5975604" y="3840480"/>
+            <a:ext cx="1581912" cy="438912"/>
           </a:xfrm>
           <a:prstGeom prst="rect">
             <a:avLst/>
@@ -1973,7 +1997,7 @@
               <a:buNone/>
             </a:pPr>
             <a:r>
-              <a:rPr lang="en-US" sz="1250" b="1" dirty="0">
+              <a:rPr lang="en-US" sz="1200" b="1" dirty="0">
                 <a:solidFill>
                   <a:srgbClr val="D97706"/>
                 </a:solidFill>
@@ -1983,20 +2007,20 @@
               </a:rPr>
               <a:t>MAESTRO Gate</a:t>
             </a:r>
-            <a:endParaRPr lang="en-US" sz="1250" dirty="0"/>
-          </a:p>
-        </p:txBody>
-      </p:sp>
-      <p:sp>
-        <p:nvSpPr>
-          <p:cNvPr id="16" name="Text 14"/>
-          <p:cNvSpPr/>
-          <p:nvPr/>
-        </p:nvSpPr>
-        <p:spPr>
-          <a:xfrm>
-            <a:off x="7639812" y="2697480"/>
-            <a:ext cx="274320" cy="457200"/>
+            <a:endParaRPr lang="en-US" sz="1200" dirty="0"/>
+          </a:p>
+        </p:txBody>
+      </p:sp>
+      <p:sp>
+        <p:nvSpPr>
+          <p:cNvPr id="17" name="Text 14"/>
+          <p:cNvSpPr/>
+          <p:nvPr/>
+        </p:nvSpPr>
+        <p:spPr>
+          <a:xfrm>
+            <a:off x="7584948" y="3840480"/>
+            <a:ext cx="256032" cy="438912"/>
           </a:xfrm>
           <a:prstGeom prst="rect">
             <a:avLst/>
@@ -2012,27 +2036,27 @@
               <a:buNone/>
             </a:pPr>
             <a:r>
-              <a:rPr lang="en-US" sz="1400" dirty="0">
+              <a:rPr lang="en-US" sz="1300" dirty="0">
                 <a:solidFill>
                   <a:srgbClr val="5B6B86"/>
                 </a:solidFill>
               </a:rPr>
               <a:t>→</a:t>
             </a:r>
-            <a:endParaRPr lang="en-US" sz="1400" dirty="0"/>
-          </a:p>
-        </p:txBody>
-      </p:sp>
-      <p:sp>
-        <p:nvSpPr>
-          <p:cNvPr id="17" name="Shape 15"/>
-          <p:cNvSpPr/>
-          <p:nvPr/>
-        </p:nvSpPr>
-        <p:spPr>
-          <a:xfrm>
-            <a:off x="7932420" y="2697480"/>
-            <a:ext cx="2107692" cy="457200"/>
+            <a:endParaRPr lang="en-US" sz="1300" dirty="0"/>
+          </a:p>
+        </p:txBody>
+      </p:sp>
+      <p:sp>
+        <p:nvSpPr>
+          <p:cNvPr id="18" name="Shape 15"/>
+          <p:cNvSpPr/>
+          <p:nvPr/>
+        </p:nvSpPr>
+        <p:spPr>
+          <a:xfrm>
+            <a:off x="7859268" y="3840480"/>
+            <a:ext cx="2107692" cy="438912"/>
           </a:xfrm>
           <a:prstGeom prst="roundRect">
             <a:avLst>
@@ -2040,11 +2064,11 @@
             </a:avLst>
           </a:prstGeom>
           <a:solidFill>
-            <a:srgbClr val="1B2742"/>
+            <a:srgbClr val="161D33"/>
           </a:solidFill>
           <a:ln w="12700">
             <a:solidFill>
-              <a:srgbClr val="0E7C86"/>
+              <a:srgbClr val="008AFC"/>
             </a:solidFill>
             <a:prstDash val="solid"/>
           </a:ln>
@@ -2052,14 +2076,14 @@
       </p:sp>
       <p:sp>
         <p:nvSpPr>
-          <p:cNvPr id="18" name="Text 16"/>
-          <p:cNvSpPr/>
-          <p:nvPr/>
-        </p:nvSpPr>
-        <p:spPr>
-          <a:xfrm>
-            <a:off x="7932420" y="2697480"/>
-            <a:ext cx="2107692" cy="457200"/>
+          <p:cNvPr id="19" name="Text 16"/>
+          <p:cNvSpPr/>
+          <p:nvPr/>
+        </p:nvSpPr>
+        <p:spPr>
+          <a:xfrm>
+            <a:off x="7859268" y="3840480"/>
+            <a:ext cx="2107692" cy="438912"/>
           </a:xfrm>
           <a:prstGeom prst="rect">
             <a:avLst/>
@@ -2075,9 +2099,9 @@
               <a:buNone/>
             </a:pPr>
             <a:r>
-              <a:rPr lang="en-US" sz="1250" b="1" dirty="0">
-                <a:solidFill>
-                  <a:srgbClr val="14B8A6"/>
+              <a:rPr lang="en-US" sz="1200" b="1" dirty="0">
+                <a:solidFill>
+                  <a:srgbClr val="008AFC"/>
                 </a:solidFill>
                 <a:latin typeface="Calibri" pitchFamily="34" charset="0"/>
                 <a:ea typeface="Calibri" pitchFamily="34" charset="-122"/>
@@ -2085,24 +2109,24 @@
               </a:rPr>
               <a:t>PR + Live Preview</a:t>
             </a:r>
-            <a:endParaRPr lang="en-US" sz="1250" dirty="0"/>
-          </a:p>
-        </p:txBody>
-      </p:sp>
-      <p:sp>
-        <p:nvSpPr>
-          <p:cNvPr id="19" name="Shape 17"/>
-          <p:cNvSpPr/>
-          <p:nvPr/>
-        </p:nvSpPr>
-        <p:spPr>
-          <a:xfrm>
-            <a:off x="585216" y="3648456"/>
-            <a:ext cx="11082528" cy="2304288"/>
+            <a:endParaRPr lang="en-US" sz="1200" dirty="0"/>
+          </a:p>
+        </p:txBody>
+      </p:sp>
+      <p:sp>
+        <p:nvSpPr>
+          <p:cNvPr id="20" name="Shape 17"/>
+          <p:cNvSpPr/>
+          <p:nvPr/>
+        </p:nvSpPr>
+        <p:spPr>
+          <a:xfrm>
+            <a:off x="1682496" y="4334256"/>
+            <a:ext cx="8796528" cy="1847088"/>
           </a:xfrm>
           <a:prstGeom prst="roundRect">
             <a:avLst>
-              <a:gd name="adj" fmla="val 2381"/>
+              <a:gd name="adj" fmla="val 2970"/>
             </a:avLst>
           </a:prstGeom>
           <a:solidFill>
@@ -2125,22 +2149,22 @@
       </p:sp>
       <p:pic>
         <p:nvPicPr>
-          <p:cNvPr id="20" name="Image 0" descr="/Users/cubiczan/Desktop/icohangar-repos/superplane-software-factory/assets/superplane-canvas-full.png">    </p:cNvPr>
+          <p:cNvPr id="21" name="Image 1" descr="/Users/cubiczan/Desktop/icohangar-repos/superplane-software-factory/assets/superplane-canvas-full.png">    </p:cNvPr>
           <p:cNvPicPr>
             <a:picLocks noChangeAspect="1"/>
           </p:cNvPicPr>
           <p:nvPr/>
         </p:nvPicPr>
         <p:blipFill>
-          <a:blip r:embed="rId1"/>
+          <a:blip r:embed="rId2"/>
           <a:stretch>
             <a:fillRect/>
           </a:stretch>
         </p:blipFill>
         <p:spPr>
           <a:xfrm>
-            <a:off x="640080" y="3703320"/>
-            <a:ext cx="10972800" cy="2194560"/>
+            <a:off x="1737360" y="4389120"/>
+            <a:ext cx="8686800" cy="1737360"/>
           </a:xfrm>
           <a:prstGeom prst="rect">
             <a:avLst/>
@@ -2149,30 +2173,30 @@
       </p:pic>
       <p:sp>
         <p:nvSpPr>
-          <p:cNvPr id="21" name="Text 18"/>
-          <p:cNvSpPr/>
-          <p:nvPr/>
-        </p:nvSpPr>
-        <p:spPr>
-          <a:xfrm>
-            <a:off x="640080" y="5989320"/>
-            <a:ext cx="7315200" cy="274320"/>
-          </a:xfrm>
-          <a:prstGeom prst="rect">
-            <a:avLst/>
-          </a:prstGeom>
-          <a:noFill/>
-          <a:ln/>
-        </p:spPr>
-        <p:txBody>
-          <a:bodyPr wrap="square" rtlCol="0" anchor="ctr"/>
-          <a:lstStyle/>
-          <a:p>
-            <a:pPr indent="0" marL="0">
-              <a:buNone/>
-            </a:pPr>
-            <a:r>
-              <a:rPr lang="en-US" sz="1100" i="1" dirty="0">
+          <p:cNvPr id="22" name="Text 18"/>
+          <p:cNvSpPr/>
+          <p:nvPr/>
+        </p:nvSpPr>
+        <p:spPr>
+          <a:xfrm>
+            <a:off x="640080" y="6419088"/>
+            <a:ext cx="10972800" cy="301752"/>
+          </a:xfrm>
+          <a:prstGeom prst="rect">
+            <a:avLst/>
+          </a:prstGeom>
+          <a:noFill/>
+          <a:ln/>
+        </p:spPr>
+        <p:txBody>
+          <a:bodyPr wrap="square" rtlCol="0" anchor="ctr"/>
+          <a:lstStyle/>
+          <a:p>
+            <a:pPr indent="0" marL="0">
+              <a:buNone/>
+            </a:pPr>
+            <a:r>
+              <a:rPr lang="en-US" sz="1100" dirty="0">
                 <a:solidFill>
                   <a:srgbClr val="8FA0BD"/>
                 </a:solidFill>
@@ -2180,46 +2204,7 @@
                 <a:ea typeface="Calibri" pitchFamily="34" charset="-122"/>
                 <a:cs typeface="Calibri" pitchFamily="34" charset="-120"/>
               </a:rPr>
-              <a:t>The live factory canvas — 28 nodes, 0 errors / 0 warnings</a:t>
-            </a:r>
-            <a:endParaRPr lang="en-US" sz="1100" dirty="0"/>
-          </a:p>
-        </p:txBody>
-      </p:sp>
-      <p:sp>
-        <p:nvSpPr>
-          <p:cNvPr id="22" name="Text 19"/>
-          <p:cNvSpPr/>
-          <p:nvPr/>
-        </p:nvSpPr>
-        <p:spPr>
-          <a:xfrm>
-            <a:off x="6979615" y="5989320"/>
-            <a:ext cx="4572000" cy="274320"/>
-          </a:xfrm>
-          <a:prstGeom prst="rect">
-            <a:avLst/>
-          </a:prstGeom>
-          <a:noFill/>
-          <a:ln/>
-        </p:spPr>
-        <p:txBody>
-          <a:bodyPr wrap="square" rtlCol="0" anchor="ctr"/>
-          <a:lstStyle/>
-          <a:p>
-            <a:pPr algn="r" indent="0" marL="0">
-              <a:buNone/>
-            </a:pPr>
-            <a:r>
-              <a:rPr lang="en-US" sz="1100" dirty="0">
-                <a:solidFill>
-                  <a:srgbClr val="CADCFC"/>
-                </a:solidFill>
-                <a:latin typeface="Calibri" pitchFamily="34" charset="0"/>
-                <a:ea typeface="Calibri" pitchFamily="34" charset="-122"/>
-                <a:cs typeface="Calibri" pitchFamily="34" charset="-120"/>
-              </a:rPr>
-              <a:t>Team Cubiczan  ·  software-factory-246a.onrender.com</a:t>
+              <a:t>Team Cubiczan  ·  Production-grade, open-source, governed agentic AI  ·  software-factory-246a.onrender.com</a:t>
             </a:r>
             <a:endParaRPr lang="en-US" sz="1100" dirty="0"/>
           </a:p>
@@ -2266,7 +2251,7 @@
         <p:spPr>
           <a:xfrm>
             <a:off x="640080" y="548640"/>
-            <a:ext cx="10058400" cy="274320"/>
+            <a:ext cx="10515600" cy="274320"/>
           </a:xfrm>
           <a:prstGeom prst="rect">
             <a:avLst/>
@@ -2284,7 +2269,7 @@
             <a:r>
               <a:rPr lang="en-US" sz="1200" b="1" spc="200" kern="0" dirty="0">
                 <a:solidFill>
-                  <a:srgbClr val="0E7C86"/>
+                  <a:srgbClr val="008AFC"/>
                 </a:solidFill>
                 <a:latin typeface="Calibri" pitchFamily="34" charset="0"/>
                 <a:ea typeface="Calibri" pitchFamily="34" charset="-122"/>
@@ -2305,25 +2290,25 @@
         <p:spPr>
           <a:xfrm>
             <a:off x="640080" y="868680"/>
-            <a:ext cx="10972800" cy="731520"/>
-          </a:xfrm>
-          <a:prstGeom prst="rect">
-            <a:avLst/>
-          </a:prstGeom>
-          <a:noFill/>
-          <a:ln/>
-        </p:spPr>
-        <p:txBody>
-          <a:bodyPr wrap="square" rtlCol="0" anchor="ctr"/>
-          <a:lstStyle/>
-          <a:p>
-            <a:pPr indent="0" marL="0">
-              <a:buNone/>
-            </a:pPr>
-            <a:r>
-              <a:rPr lang="en-US" sz="2700" b="1" dirty="0">
-                <a:solidFill>
-                  <a:srgbClr val="1A2138"/>
+            <a:ext cx="10972800" cy="640080"/>
+          </a:xfrm>
+          <a:prstGeom prst="rect">
+            <a:avLst/>
+          </a:prstGeom>
+          <a:noFill/>
+          <a:ln/>
+        </p:spPr>
+        <p:txBody>
+          <a:bodyPr wrap="square" rtlCol="0" anchor="ctr"/>
+          <a:lstStyle/>
+          <a:p>
+            <a:pPr indent="0" marL="0">
+              <a:buNone/>
+            </a:pPr>
+            <a:r>
+              <a:rPr lang="en-US" sz="2600" b="1" dirty="0">
+                <a:solidFill>
+                  <a:srgbClr val="141D3D"/>
                 </a:solidFill>
                 <a:latin typeface="Calibri" pitchFamily="34" charset="0"/>
                 <a:ea typeface="Calibri" pitchFamily="34" charset="-122"/>
@@ -2331,7 +2316,7 @@
               </a:rPr>
               <a:t>Shipping features is manual — and "let an agent do it" adds new risk</a:t>
             </a:r>
-            <a:endParaRPr lang="en-US" sz="2700" dirty="0"/>
+            <a:endParaRPr lang="en-US" sz="2600" dirty="0"/>
           </a:p>
         </p:txBody>
       </p:sp>
@@ -2343,16 +2328,16 @@
         </p:nvSpPr>
         <p:spPr>
           <a:xfrm>
-            <a:off x="640080" y="1874520"/>
-            <a:ext cx="5257800" cy="3383280"/>
+            <a:off x="640080" y="1783080"/>
+            <a:ext cx="5257800" cy="3246120"/>
           </a:xfrm>
           <a:prstGeom prst="roundRect">
             <a:avLst>
-              <a:gd name="adj" fmla="val 2703"/>
+              <a:gd name="adj" fmla="val 2817"/>
             </a:avLst>
           </a:prstGeom>
           <a:solidFill>
-            <a:srgbClr val="F1F5F9"/>
+            <a:srgbClr val="F2F5FA"/>
           </a:solidFill>
           <a:ln w="12700">
             <a:solidFill>
@@ -2370,14 +2355,14 @@
         </p:nvSpPr>
         <p:spPr>
           <a:xfrm>
-            <a:off x="1005840" y="2240280"/>
-            <a:ext cx="777240" cy="777240"/>
+            <a:off x="1005840" y="2103120"/>
+            <a:ext cx="749808" cy="749808"/>
           </a:xfrm>
           <a:prstGeom prst="ellipse">
             <a:avLst/>
           </a:prstGeom>
           <a:solidFill>
-            <a:srgbClr val="0E7C86"/>
+            <a:srgbClr val="25318D"/>
           </a:solidFill>
           <a:ln/>
         </p:spPr>
@@ -2390,8 +2375,8 @@
         </p:nvSpPr>
         <p:spPr>
           <a:xfrm>
-            <a:off x="1005840" y="2240280"/>
-            <a:ext cx="777240" cy="777240"/>
+            <a:off x="1005840" y="2103120"/>
+            <a:ext cx="749808" cy="749808"/>
           </a:xfrm>
           <a:prstGeom prst="rect">
             <a:avLst/>
@@ -2407,7 +2392,7 @@
               <a:buNone/>
             </a:pPr>
             <a:r>
-              <a:rPr lang="en-US" sz="1870" b="1" dirty="0">
+              <a:rPr lang="en-US" sz="1804" b="1" dirty="0">
                 <a:solidFill>
                   <a:srgbClr val="FFFFFF"/>
                 </a:solidFill>
@@ -2415,9 +2400,9 @@
                 <a:ea typeface="Calibri" pitchFamily="34" charset="-122"/>
                 <a:cs typeface="Calibri" pitchFamily="34" charset="-120"/>
               </a:rPr>
-              <a:t>⏳</a:t>
-            </a:r>
-            <a:endParaRPr lang="en-US" sz="1870" dirty="0"/>
+              <a:t>⏱</a:t>
+            </a:r>
+            <a:endParaRPr lang="en-US" sz="1804" dirty="0"/>
           </a:p>
         </p:txBody>
       </p:sp>
@@ -2429,26 +2414,26 @@
         </p:nvSpPr>
         <p:spPr>
           <a:xfrm>
-            <a:off x="1965960" y="2286000"/>
-            <a:ext cx="3749040" cy="685800"/>
-          </a:xfrm>
-          <a:prstGeom prst="rect">
-            <a:avLst/>
-          </a:prstGeom>
-          <a:noFill/>
-          <a:ln/>
-        </p:spPr>
-        <p:txBody>
-          <a:bodyPr wrap="square" rtlCol="0" anchor="ctr"/>
-          <a:lstStyle/>
-          <a:p>
-            <a:pPr indent="0" marL="0">
-              <a:buNone/>
-            </a:pPr>
-            <a:r>
-              <a:rPr lang="en-US" sz="1700" b="1" dirty="0">
-                <a:solidFill>
-                  <a:srgbClr val="1A2138"/>
+            <a:off x="1938528" y="2121408"/>
+            <a:ext cx="3749040" cy="713232"/>
+          </a:xfrm>
+          <a:prstGeom prst="rect">
+            <a:avLst/>
+          </a:prstGeom>
+          <a:noFill/>
+          <a:ln/>
+        </p:spPr>
+        <p:txBody>
+          <a:bodyPr wrap="square" rtlCol="0" anchor="ctr"/>
+          <a:lstStyle/>
+          <a:p>
+            <a:pPr indent="0" marL="0">
+              <a:buNone/>
+            </a:pPr>
+            <a:r>
+              <a:rPr lang="en-US" sz="1650" b="1" dirty="0">
+                <a:solidFill>
+                  <a:srgbClr val="141D3D"/>
                 </a:solidFill>
                 <a:latin typeface="Calibri" pitchFamily="34" charset="0"/>
                 <a:ea typeface="Calibri" pitchFamily="34" charset="-122"/>
@@ -2456,7 +2441,7 @@
               </a:rPr>
               <a:t>Feature production is slow &amp; hands-on</a:t>
             </a:r>
-            <a:endParaRPr lang="en-US" sz="1700" dirty="0"/>
+            <a:endParaRPr lang="en-US" sz="1650" dirty="0"/>
           </a:p>
         </p:txBody>
       </p:sp>
@@ -2468,8 +2453,8 @@
         </p:nvSpPr>
         <p:spPr>
           <a:xfrm>
-            <a:off x="1005840" y="3246120"/>
-            <a:ext cx="4572000" cy="1828800"/>
+            <a:off x="1005840" y="3063240"/>
+            <a:ext cx="4572000" cy="1783080"/>
           </a:xfrm>
           <a:prstGeom prst="rect">
             <a:avLst/>
@@ -2483,13 +2468,16 @@
           <a:p>
             <a:pPr marL="203200" indent="-203200">
               <a:lnSpc>
-                <a:spcPct val="112000"/>
+                <a:spcPct val="110000"/>
               </a:lnSpc>
+              <a:spcAft>
+                <a:spcPts val="600"/>
+              </a:spcAft>
               <a:buSzPct val="100000"/>
               <a:buChar char="•"/>
             </a:pPr>
             <a:r>
-              <a:rPr lang="en-US" sz="1450" dirty="0">
+              <a:rPr lang="en-US" sz="1400" dirty="0">
                 <a:solidFill>
                   <a:srgbClr val="33405A"/>
                 </a:solidFill>
@@ -2497,16 +2485,23 @@
                 <a:ea typeface="Calibri" pitchFamily="34" charset="-122"/>
                 <a:cs typeface="Calibri" pitchFamily="34" charset="-120"/>
               </a:rPr>
-              <a:t>Idea → spec → code → review → deploy is stitched by hand</a:t>
-            </a:r>
-            <a:pPr indent="0" marL="0">
+              <a:t>Idea → spec → code → review → deploy stitched by hand</a:t>
+            </a:r>
+            <a:endParaRPr lang="en-US" sz="1400" dirty="0"/>
+          </a:p>
+          <a:p>
+            <a:pPr marL="203200" indent="-203200">
               <a:lnSpc>
-                <a:spcPct val="112000"/>
+                <a:spcPct val="110000"/>
               </a:lnSpc>
-              <a:buNone/>
-            </a:pPr>
-            <a:r>
-              <a:rPr lang="en-US" sz="1450" dirty="0">
+              <a:spcAft>
+                <a:spcPts val="600"/>
+              </a:spcAft>
+              <a:buSzPct val="100000"/>
+              <a:buChar char="•"/>
+            </a:pPr>
+            <a:r>
+              <a:rPr lang="en-US" sz="1400" dirty="0">
                 <a:solidFill>
                   <a:srgbClr val="33405A"/>
                 </a:solidFill>
@@ -2516,14 +2511,21 @@
               </a:rPr>
               <a:t>Every handoff loses context and time</a:t>
             </a:r>
-            <a:pPr indent="0" marL="0">
+            <a:endParaRPr lang="en-US" sz="1400" dirty="0"/>
+          </a:p>
+          <a:p>
+            <a:pPr marL="203200" indent="-203200">
               <a:lnSpc>
-                <a:spcPct val="112000"/>
+                <a:spcPct val="110000"/>
               </a:lnSpc>
-              <a:buNone/>
-            </a:pPr>
-            <a:r>
-              <a:rPr lang="en-US" sz="1450" dirty="0">
+              <a:spcAft>
+                <a:spcPts val="600"/>
+              </a:spcAft>
+              <a:buSzPct val="100000"/>
+              <a:buChar char="•"/>
+            </a:pPr>
+            <a:r>
+              <a:rPr lang="en-US" sz="1400" dirty="0">
                 <a:solidFill>
                   <a:srgbClr val="33405A"/>
                 </a:solidFill>
@@ -2533,7 +2535,7 @@
               </a:rPr>
               <a:t>PoCs for backlog issues rarely get built</a:t>
             </a:r>
-            <a:endParaRPr lang="en-US" sz="1450" dirty="0"/>
+            <a:endParaRPr lang="en-US" sz="1400" dirty="0"/>
           </a:p>
         </p:txBody>
       </p:sp>
@@ -2545,16 +2547,16 @@
         </p:nvSpPr>
         <p:spPr>
           <a:xfrm>
-            <a:off x="6217920" y="1874520"/>
-            <a:ext cx="5257800" cy="3383280"/>
+            <a:off x="6217920" y="1783080"/>
+            <a:ext cx="5257800" cy="3246120"/>
           </a:xfrm>
           <a:prstGeom prst="roundRect">
             <a:avLst>
-              <a:gd name="adj" fmla="val 2703"/>
+              <a:gd name="adj" fmla="val 2817"/>
             </a:avLst>
           </a:prstGeom>
           <a:solidFill>
-            <a:srgbClr val="F1F5F9"/>
+            <a:srgbClr val="F2F5FA"/>
           </a:solidFill>
           <a:ln w="12700">
             <a:solidFill>
@@ -2572,8 +2574,8 @@
         </p:nvSpPr>
         <p:spPr>
           <a:xfrm>
-            <a:off x="6583680" y="2240280"/>
-            <a:ext cx="777240" cy="777240"/>
+            <a:off x="6583680" y="2103120"/>
+            <a:ext cx="749808" cy="749808"/>
           </a:xfrm>
           <a:prstGeom prst="ellipse">
             <a:avLst/>
@@ -2592,8 +2594,8 @@
         </p:nvSpPr>
         <p:spPr>
           <a:xfrm>
-            <a:off x="6583680" y="2240280"/>
-            <a:ext cx="777240" cy="777240"/>
+            <a:off x="6583680" y="2103120"/>
+            <a:ext cx="749808" cy="749808"/>
           </a:xfrm>
           <a:prstGeom prst="rect">
             <a:avLst/>
@@ -2609,7 +2611,7 @@
               <a:buNone/>
             </a:pPr>
             <a:r>
-              <a:rPr lang="en-US" sz="1870" b="1" dirty="0">
+              <a:rPr lang="en-US" sz="1804" b="1" dirty="0">
                 <a:solidFill>
                   <a:srgbClr val="FFFFFF"/>
                 </a:solidFill>
@@ -2619,7 +2621,7 @@
               </a:rPr>
               <a:t>⚠</a:t>
             </a:r>
-            <a:endParaRPr lang="en-US" sz="1870" dirty="0"/>
+            <a:endParaRPr lang="en-US" sz="1804" dirty="0"/>
           </a:p>
         </p:txBody>
       </p:sp>
@@ -2631,26 +2633,26 @@
         </p:nvSpPr>
         <p:spPr>
           <a:xfrm>
-            <a:off x="7543800" y="2286000"/>
-            <a:ext cx="3749040" cy="685800"/>
-          </a:xfrm>
-          <a:prstGeom prst="rect">
-            <a:avLst/>
-          </a:prstGeom>
-          <a:noFill/>
-          <a:ln/>
-        </p:spPr>
-        <p:txBody>
-          <a:bodyPr wrap="square" rtlCol="0" anchor="ctr"/>
-          <a:lstStyle/>
-          <a:p>
-            <a:pPr indent="0" marL="0">
-              <a:buNone/>
-            </a:pPr>
-            <a:r>
-              <a:rPr lang="en-US" sz="1700" b="1" dirty="0">
-                <a:solidFill>
-                  <a:srgbClr val="1A2138"/>
+            <a:off x="7516368" y="2121408"/>
+            <a:ext cx="3749040" cy="713232"/>
+          </a:xfrm>
+          <a:prstGeom prst="rect">
+            <a:avLst/>
+          </a:prstGeom>
+          <a:noFill/>
+          <a:ln/>
+        </p:spPr>
+        <p:txBody>
+          <a:bodyPr wrap="square" rtlCol="0" anchor="ctr"/>
+          <a:lstStyle/>
+          <a:p>
+            <a:pPr indent="0" marL="0">
+              <a:buNone/>
+            </a:pPr>
+            <a:r>
+              <a:rPr lang="en-US" sz="1650" b="1" dirty="0">
+                <a:solidFill>
+                  <a:srgbClr val="141D3D"/>
                 </a:solidFill>
                 <a:latin typeface="Calibri" pitchFamily="34" charset="0"/>
                 <a:ea typeface="Calibri" pitchFamily="34" charset="-122"/>
@@ -2658,7 +2660,7 @@
               </a:rPr>
               <a:t>Agentic factories create new attack surface</a:t>
             </a:r>
-            <a:endParaRPr lang="en-US" sz="1700" dirty="0"/>
+            <a:endParaRPr lang="en-US" sz="1650" dirty="0"/>
           </a:p>
         </p:txBody>
       </p:sp>
@@ -2670,8 +2672,8 @@
         </p:nvSpPr>
         <p:spPr>
           <a:xfrm>
-            <a:off x="6583680" y="3246120"/>
-            <a:ext cx="4572000" cy="1828800"/>
+            <a:off x="6583680" y="3063240"/>
+            <a:ext cx="4572000" cy="1783080"/>
           </a:xfrm>
           <a:prstGeom prst="rect">
             <a:avLst/>
@@ -2685,13 +2687,16 @@
           <a:p>
             <a:pPr marL="203200" indent="-203200">
               <a:lnSpc>
-                <a:spcPct val="112000"/>
+                <a:spcPct val="110000"/>
               </a:lnSpc>
+              <a:spcAft>
+                <a:spcPts val="600"/>
+              </a:spcAft>
               <a:buSzPct val="100000"/>
               <a:buChar char="•"/>
             </a:pPr>
             <a:r>
-              <a:rPr lang="en-US" sz="1450" dirty="0">
+              <a:rPr lang="en-US" sz="1400" dirty="0">
                 <a:solidFill>
                   <a:srgbClr val="33405A"/>
                 </a:solidFill>
@@ -2699,16 +2704,23 @@
                 <a:ea typeface="Calibri" pitchFamily="34" charset="-122"/>
                 <a:cs typeface="Calibri" pitchFamily="34" charset="-120"/>
               </a:rPr>
-              <a:t>Agents that write &amp; ship code = agentic-AI system</a:t>
-            </a:r>
-            <a:pPr indent="0" marL="0">
+              <a:t>Agents that write &amp; ship code = an agentic-AI system</a:t>
+            </a:r>
+            <a:endParaRPr lang="en-US" sz="1400" dirty="0"/>
+          </a:p>
+          <a:p>
+            <a:pPr marL="203200" indent="-203200">
               <a:lnSpc>
-                <a:spcPct val="112000"/>
+                <a:spcPct val="110000"/>
               </a:lnSpc>
-              <a:buNone/>
-            </a:pPr>
-            <a:r>
-              <a:rPr lang="en-US" sz="1450" dirty="0">
+              <a:spcAft>
+                <a:spcPts val="600"/>
+              </a:spcAft>
+              <a:buSzPct val="100000"/>
+              <a:buChar char="•"/>
+            </a:pPr>
+            <a:r>
+              <a:rPr lang="en-US" sz="1400" dirty="0">
                 <a:solidFill>
                   <a:srgbClr val="33405A"/>
                 </a:solidFill>
@@ -2718,14 +2730,21 @@
               </a:rPr>
               <a:t>Prompt injection becomes a code-execution path</a:t>
             </a:r>
-            <a:pPr indent="0" marL="0">
+            <a:endParaRPr lang="en-US" sz="1400" dirty="0"/>
+          </a:p>
+          <a:p>
+            <a:pPr marL="203200" indent="-203200">
               <a:lnSpc>
-                <a:spcPct val="112000"/>
+                <a:spcPct val="110000"/>
               </a:lnSpc>
-              <a:buNone/>
-            </a:pPr>
-            <a:r>
-              <a:rPr lang="en-US" sz="1450" dirty="0">
+              <a:spcAft>
+                <a:spcPts val="600"/>
+              </a:spcAft>
+              <a:buSzPct val="100000"/>
+              <a:buChar char="•"/>
+            </a:pPr>
+            <a:r>
+              <a:rPr lang="en-US" sz="1400" dirty="0">
                 <a:solidFill>
                   <a:srgbClr val="33405A"/>
                 </a:solidFill>
@@ -2735,7 +2754,7 @@
               </a:rPr>
               <a:t>Tool access becomes lateral movement — SAST never modeled this</a:t>
             </a:r>
-            <a:endParaRPr lang="en-US" sz="1450" dirty="0"/>
+            <a:endParaRPr lang="en-US" sz="1400" dirty="0"/>
           </a:p>
         </p:txBody>
       </p:sp>
@@ -2747,7 +2766,7 @@
         </p:nvSpPr>
         <p:spPr>
           <a:xfrm>
-            <a:off x="640080" y="5577840"/>
+            <a:off x="640080" y="5349240"/>
             <a:ext cx="10972800" cy="548640"/>
           </a:xfrm>
           <a:prstGeom prst="rect">
@@ -2766,7 +2785,7 @@
             <a:r>
               <a:rPr lang="en-US" sz="1500" i="1" dirty="0">
                 <a:solidFill>
-                  <a:srgbClr val="0E7C86"/>
+                  <a:srgbClr val="008AFC"/>
                 </a:solidFill>
                 <a:latin typeface="Calibri" pitchFamily="34" charset="0"/>
                 <a:ea typeface="Calibri" pitchFamily="34" charset="-122"/>
@@ -2775,6 +2794,45 @@
               <a:t>Our bet: automate the whole loop on SuperPlane — and put an agentic-AI threat model in the gate before any PR.</a:t>
             </a:r>
             <a:endParaRPr lang="en-US" sz="1500" dirty="0"/>
+          </a:p>
+        </p:txBody>
+      </p:sp>
+      <p:sp>
+        <p:nvSpPr>
+          <p:cNvPr id="15" name="Text 13"/>
+          <p:cNvSpPr/>
+          <p:nvPr/>
+        </p:nvSpPr>
+        <p:spPr>
+          <a:xfrm>
+            <a:off x="8808415" y="6473952"/>
+            <a:ext cx="2743200" cy="274320"/>
+          </a:xfrm>
+          <a:prstGeom prst="rect">
+            <a:avLst/>
+          </a:prstGeom>
+          <a:noFill/>
+          <a:ln/>
+        </p:spPr>
+        <p:txBody>
+          <a:bodyPr wrap="square" rtlCol="0" anchor="ctr"/>
+          <a:lstStyle/>
+          <a:p>
+            <a:pPr algn="r" indent="0" marL="0">
+              <a:buNone/>
+            </a:pPr>
+            <a:r>
+              <a:rPr lang="en-US" sz="1000" dirty="0">
+                <a:solidFill>
+                  <a:srgbClr val="64748B"/>
+                </a:solidFill>
+                <a:latin typeface="Calibri" pitchFamily="34" charset="0"/>
+                <a:ea typeface="Calibri" pitchFamily="34" charset="-122"/>
+                <a:cs typeface="Calibri" pitchFamily="34" charset="-120"/>
+              </a:rPr>
+              <a:t>www.cubiczan.com</a:t>
+            </a:r>
+            <a:endParaRPr lang="en-US" sz="1000" dirty="0"/>
           </a:p>
         </p:txBody>
       </p:sp>
@@ -2819,7 +2877,7 @@
         <p:spPr>
           <a:xfrm>
             <a:off x="640080" y="548640"/>
-            <a:ext cx="10058400" cy="274320"/>
+            <a:ext cx="10515600" cy="274320"/>
           </a:xfrm>
           <a:prstGeom prst="rect">
             <a:avLst/>
@@ -2837,7 +2895,7 @@
             <a:r>
               <a:rPr lang="en-US" sz="1200" b="1" spc="200" kern="0" dirty="0">
                 <a:solidFill>
-                  <a:srgbClr val="0E7C86"/>
+                  <a:srgbClr val="008AFC"/>
                 </a:solidFill>
                 <a:latin typeface="Calibri" pitchFamily="34" charset="0"/>
                 <a:ea typeface="Calibri" pitchFamily="34" charset="-122"/>
@@ -2858,25 +2916,25 @@
         <p:spPr>
           <a:xfrm>
             <a:off x="640080" y="868680"/>
-            <a:ext cx="10972800" cy="640080"/>
-          </a:xfrm>
-          <a:prstGeom prst="rect">
-            <a:avLst/>
-          </a:prstGeom>
-          <a:noFill/>
-          <a:ln/>
-        </p:spPr>
-        <p:txBody>
-          <a:bodyPr wrap="square" rtlCol="0" anchor="ctr"/>
-          <a:lstStyle/>
-          <a:p>
-            <a:pPr indent="0" marL="0">
-              <a:buNone/>
-            </a:pPr>
-            <a:r>
-              <a:rPr lang="en-US" sz="2700" b="1" dirty="0">
-                <a:solidFill>
-                  <a:srgbClr val="1A2138"/>
+            <a:ext cx="10972800" cy="594360"/>
+          </a:xfrm>
+          <a:prstGeom prst="rect">
+            <a:avLst/>
+          </a:prstGeom>
+          <a:noFill/>
+          <a:ln/>
+        </p:spPr>
+        <p:txBody>
+          <a:bodyPr wrap="square" rtlCol="0" anchor="ctr"/>
+          <a:lstStyle/>
+          <a:p>
+            <a:pPr indent="0" marL="0">
+              <a:buNone/>
+            </a:pPr>
+            <a:r>
+              <a:rPr lang="en-US" sz="2600" b="1" dirty="0">
+                <a:solidFill>
+                  <a:srgbClr val="141D3D"/>
                 </a:solidFill>
                 <a:latin typeface="Calibri" pitchFamily="34" charset="0"/>
                 <a:ea typeface="Calibri" pitchFamily="34" charset="-122"/>
@@ -2884,7 +2942,7 @@
               </a:rPr>
               <a:t>An end-to-end factory, fully on the SuperPlane canvas</a:t>
             </a:r>
-            <a:endParaRPr lang="en-US" sz="2700" dirty="0"/>
+            <a:endParaRPr lang="en-US" sz="2600" dirty="0"/>
           </a:p>
         </p:txBody>
       </p:sp>
@@ -2896,7 +2954,7 @@
         </p:nvSpPr>
         <p:spPr>
           <a:xfrm>
-            <a:off x="640080" y="1783080"/>
+            <a:off x="640080" y="1691640"/>
             <a:ext cx="2084832" cy="1828800"/>
           </a:xfrm>
           <a:prstGeom prst="roundRect">
@@ -2905,7 +2963,7 @@
             </a:avLst>
           </a:prstGeom>
           <a:solidFill>
-            <a:srgbClr val="F1F5F9"/>
+            <a:srgbClr val="F2F5FA"/>
           </a:solidFill>
           <a:ln w="12700">
             <a:solidFill>
@@ -2923,14 +2981,14 @@
         </p:nvSpPr>
         <p:spPr>
           <a:xfrm>
-            <a:off x="822960" y="1965960"/>
+            <a:off x="822960" y="1874520"/>
             <a:ext cx="548640" cy="548640"/>
           </a:xfrm>
           <a:prstGeom prst="ellipse">
             <a:avLst/>
           </a:prstGeom>
           <a:solidFill>
-            <a:srgbClr val="0E7C86"/>
+            <a:srgbClr val="25318D"/>
           </a:solidFill>
           <a:ln/>
         </p:spPr>
@@ -2943,7 +3001,7 @@
         </p:nvSpPr>
         <p:spPr>
           <a:xfrm>
-            <a:off x="822960" y="1965960"/>
+            <a:off x="822960" y="1874520"/>
             <a:ext cx="548640" cy="548640"/>
           </a:xfrm>
           <a:prstGeom prst="rect">
@@ -2982,7 +3040,7 @@
         </p:nvSpPr>
         <p:spPr>
           <a:xfrm>
-            <a:off x="1463040" y="1965960"/>
+            <a:off x="1463040" y="1874520"/>
             <a:ext cx="1170432" cy="548640"/>
           </a:xfrm>
           <a:prstGeom prst="rect">
@@ -3001,7 +3059,7 @@
             <a:r>
               <a:rPr lang="en-US" sz="1600" b="1" dirty="0">
                 <a:solidFill>
-                  <a:srgbClr val="1A2138"/>
+                  <a:srgbClr val="141D3D"/>
                 </a:solidFill>
                 <a:latin typeface="Calibri" pitchFamily="34" charset="0"/>
                 <a:ea typeface="Calibri" pitchFamily="34" charset="-122"/>
@@ -3021,7 +3079,7 @@
         </p:nvSpPr>
         <p:spPr>
           <a:xfrm>
-            <a:off x="822960" y="2651760"/>
+            <a:off x="822960" y="2542032"/>
             <a:ext cx="1719072" cy="914400"/>
           </a:xfrm>
           <a:prstGeom prst="rect">
@@ -3041,7 +3099,7 @@
               <a:buNone/>
             </a:pPr>
             <a:r>
-              <a:rPr lang="en-US" sz="1200" dirty="0">
+              <a:rPr lang="en-US" sz="1150" dirty="0">
                 <a:solidFill>
                   <a:srgbClr val="33405A"/>
                 </a:solidFill>
@@ -3051,7 +3109,7 @@
               </a:rPr>
               <a:t>Feature Request or /factory on an issue</a:t>
             </a:r>
-            <a:endParaRPr lang="en-US" sz="1200" dirty="0"/>
+            <a:endParaRPr lang="en-US" sz="1150" dirty="0"/>
           </a:p>
         </p:txBody>
       </p:sp>
@@ -3063,7 +3121,7 @@
         </p:nvSpPr>
         <p:spPr>
           <a:xfrm>
-            <a:off x="2706624" y="1783080"/>
+            <a:off x="2706624" y="1691640"/>
             <a:ext cx="182880" cy="1828800"/>
           </a:xfrm>
           <a:prstGeom prst="rect">
@@ -3099,7 +3157,7 @@
         </p:nvSpPr>
         <p:spPr>
           <a:xfrm>
-            <a:off x="2889504" y="1783080"/>
+            <a:off x="2889504" y="1691640"/>
             <a:ext cx="2084832" cy="1828800"/>
           </a:xfrm>
           <a:prstGeom prst="roundRect">
@@ -3108,7 +3166,7 @@
             </a:avLst>
           </a:prstGeom>
           <a:solidFill>
-            <a:srgbClr val="F1F5F9"/>
+            <a:srgbClr val="F2F5FA"/>
           </a:solidFill>
           <a:ln w="12700">
             <a:solidFill>
@@ -3126,14 +3184,14 @@
         </p:nvSpPr>
         <p:spPr>
           <a:xfrm>
-            <a:off x="3072384" y="1965960"/>
+            <a:off x="3072384" y="1874520"/>
             <a:ext cx="548640" cy="548640"/>
           </a:xfrm>
           <a:prstGeom prst="ellipse">
             <a:avLst/>
           </a:prstGeom>
           <a:solidFill>
-            <a:srgbClr val="0E7C86"/>
+            <a:srgbClr val="25318D"/>
           </a:solidFill>
           <a:ln/>
         </p:spPr>
@@ -3146,7 +3204,7 @@
         </p:nvSpPr>
         <p:spPr>
           <a:xfrm>
-            <a:off x="3072384" y="1965960"/>
+            <a:off x="3072384" y="1874520"/>
             <a:ext cx="548640" cy="548640"/>
           </a:xfrm>
           <a:prstGeom prst="rect">
@@ -3185,7 +3243,7 @@
         </p:nvSpPr>
         <p:spPr>
           <a:xfrm>
-            <a:off x="3712464" y="1965960"/>
+            <a:off x="3712464" y="1874520"/>
             <a:ext cx="1170432" cy="548640"/>
           </a:xfrm>
           <a:prstGeom prst="rect">
@@ -3204,7 +3262,7 @@
             <a:r>
               <a:rPr lang="en-US" sz="1600" b="1" dirty="0">
                 <a:solidFill>
-                  <a:srgbClr val="1A2138"/>
+                  <a:srgbClr val="141D3D"/>
                 </a:solidFill>
                 <a:latin typeface="Calibri" pitchFamily="34" charset="0"/>
                 <a:ea typeface="Calibri" pitchFamily="34" charset="-122"/>
@@ -3224,7 +3282,7 @@
         </p:nvSpPr>
         <p:spPr>
           <a:xfrm>
-            <a:off x="3072384" y="2651760"/>
+            <a:off x="3072384" y="2542032"/>
             <a:ext cx="1719072" cy="914400"/>
           </a:xfrm>
           <a:prstGeom prst="rect">
@@ -3244,7 +3302,7 @@
               <a:buNone/>
             </a:pPr>
             <a:r>
-              <a:rPr lang="en-US" sz="1200" dirty="0">
+              <a:rPr lang="en-US" sz="1150" dirty="0">
                 <a:solidFill>
                   <a:srgbClr val="33405A"/>
                 </a:solidFill>
@@ -3254,7 +3312,7 @@
               </a:rPr>
               <a:t>LLM writes &amp; validates a spec</a:t>
             </a:r>
-            <a:endParaRPr lang="en-US" sz="1200" dirty="0"/>
+            <a:endParaRPr lang="en-US" sz="1150" dirty="0"/>
           </a:p>
         </p:txBody>
       </p:sp>
@@ -3266,7 +3324,7 @@
         </p:nvSpPr>
         <p:spPr>
           <a:xfrm>
-            <a:off x="4956048" y="1783080"/>
+            <a:off x="4956048" y="1691640"/>
             <a:ext cx="182880" cy="1828800"/>
           </a:xfrm>
           <a:prstGeom prst="rect">
@@ -3302,7 +3360,7 @@
         </p:nvSpPr>
         <p:spPr>
           <a:xfrm>
-            <a:off x="5138928" y="1783080"/>
+            <a:off x="5138928" y="1691640"/>
             <a:ext cx="2084832" cy="1828800"/>
           </a:xfrm>
           <a:prstGeom prst="roundRect">
@@ -3311,7 +3369,7 @@
             </a:avLst>
           </a:prstGeom>
           <a:solidFill>
-            <a:srgbClr val="F1F5F9"/>
+            <a:srgbClr val="F2F5FA"/>
           </a:solidFill>
           <a:ln w="12700">
             <a:solidFill>
@@ -3329,14 +3387,14 @@
         </p:nvSpPr>
         <p:spPr>
           <a:xfrm>
-            <a:off x="5321808" y="1965960"/>
+            <a:off x="5321808" y="1874520"/>
             <a:ext cx="548640" cy="548640"/>
           </a:xfrm>
           <a:prstGeom prst="ellipse">
             <a:avLst/>
           </a:prstGeom>
           <a:solidFill>
-            <a:srgbClr val="0E7C86"/>
+            <a:srgbClr val="25318D"/>
           </a:solidFill>
           <a:ln/>
         </p:spPr>
@@ -3349,7 +3407,7 @@
         </p:nvSpPr>
         <p:spPr>
           <a:xfrm>
-            <a:off x="5321808" y="1965960"/>
+            <a:off x="5321808" y="1874520"/>
             <a:ext cx="548640" cy="548640"/>
           </a:xfrm>
           <a:prstGeom prst="rect">
@@ -3388,7 +3446,7 @@
         </p:nvSpPr>
         <p:spPr>
           <a:xfrm>
-            <a:off x="5961888" y="1965960"/>
+            <a:off x="5961888" y="1874520"/>
             <a:ext cx="1170432" cy="548640"/>
           </a:xfrm>
           <a:prstGeom prst="rect">
@@ -3407,7 +3465,7 @@
             <a:r>
               <a:rPr lang="en-US" sz="1600" b="1" dirty="0">
                 <a:solidFill>
-                  <a:srgbClr val="1A2138"/>
+                  <a:srgbClr val="141D3D"/>
                 </a:solidFill>
                 <a:latin typeface="Calibri" pitchFamily="34" charset="0"/>
                 <a:ea typeface="Calibri" pitchFamily="34" charset="-122"/>
@@ -3427,7 +3485,7 @@
         </p:nvSpPr>
         <p:spPr>
           <a:xfrm>
-            <a:off x="5321808" y="2651760"/>
+            <a:off x="5321808" y="2542032"/>
             <a:ext cx="1719072" cy="914400"/>
           </a:xfrm>
           <a:prstGeom prst="rect">
@@ -3447,7 +3505,7 @@
               <a:buNone/>
             </a:pPr>
             <a:r>
-              <a:rPr lang="en-US" sz="1200" dirty="0">
+              <a:rPr lang="en-US" sz="1150" dirty="0">
                 <a:solidFill>
                   <a:srgbClr val="33405A"/>
                 </a:solidFill>
@@ -3457,7 +3515,7 @@
               </a:rPr>
               <a:t>Daytona sandbox implements + build gate</a:t>
             </a:r>
-            <a:endParaRPr lang="en-US" sz="1200" dirty="0"/>
+            <a:endParaRPr lang="en-US" sz="1150" dirty="0"/>
           </a:p>
         </p:txBody>
       </p:sp>
@@ -3469,7 +3527,7 @@
         </p:nvSpPr>
         <p:spPr>
           <a:xfrm>
-            <a:off x="7205472" y="1783080"/>
+            <a:off x="7205472" y="1691640"/>
             <a:ext cx="182880" cy="1828800"/>
           </a:xfrm>
           <a:prstGeom prst="rect">
@@ -3505,7 +3563,7 @@
         </p:nvSpPr>
         <p:spPr>
           <a:xfrm>
-            <a:off x="7388352" y="1783080"/>
+            <a:off x="7388352" y="1691640"/>
             <a:ext cx="2084832" cy="1828800"/>
           </a:xfrm>
           <a:prstGeom prst="roundRect">
@@ -3532,7 +3590,7 @@
         </p:nvSpPr>
         <p:spPr>
           <a:xfrm>
-            <a:off x="7571232" y="1965960"/>
+            <a:off x="7571232" y="1874520"/>
             <a:ext cx="548640" cy="548640"/>
           </a:xfrm>
           <a:prstGeom prst="ellipse">
@@ -3552,7 +3610,7 @@
         </p:nvSpPr>
         <p:spPr>
           <a:xfrm>
-            <a:off x="7571232" y="1965960"/>
+            <a:off x="7571232" y="1874520"/>
             <a:ext cx="548640" cy="548640"/>
           </a:xfrm>
           <a:prstGeom prst="rect">
@@ -3591,7 +3649,7 @@
         </p:nvSpPr>
         <p:spPr>
           <a:xfrm>
-            <a:off x="8211312" y="1965960"/>
+            <a:off x="8211312" y="1874520"/>
             <a:ext cx="1170432" cy="548640"/>
           </a:xfrm>
           <a:prstGeom prst="rect">
@@ -3610,7 +3668,7 @@
             <a:r>
               <a:rPr lang="en-US" sz="1600" b="1" dirty="0">
                 <a:solidFill>
-                  <a:srgbClr val="1A2138"/>
+                  <a:srgbClr val="141D3D"/>
                 </a:solidFill>
                 <a:latin typeface="Calibri" pitchFamily="34" charset="0"/>
                 <a:ea typeface="Calibri" pitchFamily="34" charset="-122"/>
@@ -3630,7 +3688,7 @@
         </p:nvSpPr>
         <p:spPr>
           <a:xfrm>
-            <a:off x="7571232" y="2651760"/>
+            <a:off x="7571232" y="2542032"/>
             <a:ext cx="1719072" cy="914400"/>
           </a:xfrm>
           <a:prstGeom prst="rect">
@@ -3650,7 +3708,7 @@
               <a:buNone/>
             </a:pPr>
             <a:r>
-              <a:rPr lang="en-US" sz="1200" dirty="0">
+              <a:rPr lang="en-US" sz="1150" dirty="0">
                 <a:solidFill>
                   <a:srgbClr val="33405A"/>
                 </a:solidFill>
@@ -3660,7 +3718,7 @@
               </a:rPr>
               <a:t>TITO · MAESTRO threat gate (critical = blocked)</a:t>
             </a:r>
-            <a:endParaRPr lang="en-US" sz="1200" dirty="0"/>
+            <a:endParaRPr lang="en-US" sz="1150" dirty="0"/>
           </a:p>
         </p:txBody>
       </p:sp>
@@ -3672,7 +3730,7 @@
         </p:nvSpPr>
         <p:spPr>
           <a:xfrm>
-            <a:off x="9454896" y="1783080"/>
+            <a:off x="9454896" y="1691640"/>
             <a:ext cx="182880" cy="1828800"/>
           </a:xfrm>
           <a:prstGeom prst="rect">
@@ -3708,7 +3766,7 @@
         </p:nvSpPr>
         <p:spPr>
           <a:xfrm>
-            <a:off x="9637776" y="1783080"/>
+            <a:off x="9637776" y="1691640"/>
             <a:ext cx="2084832" cy="1828800"/>
           </a:xfrm>
           <a:prstGeom prst="roundRect">
@@ -3717,11 +3775,11 @@
             </a:avLst>
           </a:prstGeom>
           <a:solidFill>
-            <a:srgbClr val="ECFDF5"/>
+            <a:srgbClr val="EAF4FF"/>
           </a:solidFill>
           <a:ln w="12700">
             <a:solidFill>
-              <a:srgbClr val="14B8A6"/>
+              <a:srgbClr val="008AFC"/>
             </a:solidFill>
             <a:prstDash val="solid"/>
           </a:ln>
@@ -3735,14 +3793,14 @@
         </p:nvSpPr>
         <p:spPr>
           <a:xfrm>
-            <a:off x="9820656" y="1965960"/>
+            <a:off x="9820656" y="1874520"/>
             <a:ext cx="548640" cy="548640"/>
           </a:xfrm>
           <a:prstGeom prst="ellipse">
             <a:avLst/>
           </a:prstGeom>
           <a:solidFill>
-            <a:srgbClr val="14B8A6"/>
+            <a:srgbClr val="008AFC"/>
           </a:solidFill>
           <a:ln/>
         </p:spPr>
@@ -3755,7 +3813,7 @@
         </p:nvSpPr>
         <p:spPr>
           <a:xfrm>
-            <a:off x="9820656" y="1965960"/>
+            <a:off x="9820656" y="1874520"/>
             <a:ext cx="548640" cy="548640"/>
           </a:xfrm>
           <a:prstGeom prst="rect">
@@ -3794,7 +3852,7 @@
         </p:nvSpPr>
         <p:spPr>
           <a:xfrm>
-            <a:off x="10460736" y="1965960"/>
+            <a:off x="10460736" y="1874520"/>
             <a:ext cx="1170432" cy="548640"/>
           </a:xfrm>
           <a:prstGeom prst="rect">
@@ -3813,7 +3871,7 @@
             <a:r>
               <a:rPr lang="en-US" sz="1600" b="1" dirty="0">
                 <a:solidFill>
-                  <a:srgbClr val="1A2138"/>
+                  <a:srgbClr val="141D3D"/>
                 </a:solidFill>
                 <a:latin typeface="Calibri" pitchFamily="34" charset="0"/>
                 <a:ea typeface="Calibri" pitchFamily="34" charset="-122"/>
@@ -3833,7 +3891,7 @@
         </p:nvSpPr>
         <p:spPr>
           <a:xfrm>
-            <a:off x="9820656" y="2651760"/>
+            <a:off x="9820656" y="2542032"/>
             <a:ext cx="1719072" cy="914400"/>
           </a:xfrm>
           <a:prstGeom prst="rect">
@@ -3853,7 +3911,7 @@
               <a:buNone/>
             </a:pPr>
             <a:r>
-              <a:rPr lang="en-US" sz="1200" dirty="0">
+              <a:rPr lang="en-US" sz="1150" dirty="0">
                 <a:solidFill>
                   <a:srgbClr val="33405A"/>
                 </a:solidFill>
@@ -3863,7 +3921,7 @@
               </a:rPr>
               <a:t>PR + Render preview, live URL on the PR</a:t>
             </a:r>
-            <a:endParaRPr lang="en-US" sz="1200" dirty="0"/>
+            <a:endParaRPr lang="en-US" sz="1150" dirty="0"/>
           </a:p>
         </p:txBody>
       </p:sp>
@@ -3875,24 +3933,24 @@
         </p:nvSpPr>
         <p:spPr>
           <a:xfrm>
-            <a:off x="640080" y="3794760"/>
-            <a:ext cx="10972800" cy="365760"/>
-          </a:xfrm>
-          <a:prstGeom prst="rect">
-            <a:avLst/>
-          </a:prstGeom>
-          <a:noFill/>
-          <a:ln/>
-        </p:spPr>
-        <p:txBody>
-          <a:bodyPr wrap="square" rtlCol="0" anchor="ctr"/>
-          <a:lstStyle/>
-          <a:p>
-            <a:pPr indent="0" marL="0">
-              <a:buNone/>
-            </a:pPr>
-            <a:r>
-              <a:rPr lang="en-US" sz="1400" i="1" dirty="0">
+            <a:off x="640080" y="3657600"/>
+            <a:ext cx="10972800" cy="320040"/>
+          </a:xfrm>
+          <a:prstGeom prst="rect">
+            <a:avLst/>
+          </a:prstGeom>
+          <a:noFill/>
+          <a:ln/>
+        </p:spPr>
+        <p:txBody>
+          <a:bodyPr wrap="square" rtlCol="0" anchor="ctr"/>
+          <a:lstStyle/>
+          <a:p>
+            <a:pPr indent="0" marL="0">
+              <a:buNone/>
+            </a:pPr>
+            <a:r>
+              <a:rPr lang="en-US" sz="1350" i="1" dirty="0">
                 <a:solidFill>
                   <a:srgbClr val="64748B"/>
                 </a:solidFill>
@@ -3902,7 +3960,7 @@
               </a:rPr>
               <a:t>Each stage validates the previous one — a failed gate never produces a PR.</a:t>
             </a:r>
-            <a:endParaRPr lang="en-US" sz="1400" dirty="0"/>
+            <a:endParaRPr lang="en-US" sz="1350" dirty="0"/>
           </a:p>
         </p:txBody>
       </p:sp>
@@ -3914,12 +3972,12 @@
         </p:nvSpPr>
         <p:spPr>
           <a:xfrm>
-            <a:off x="1014984" y="4151376"/>
-            <a:ext cx="10168128" cy="2121408"/>
+            <a:off x="1225296" y="4105656"/>
+            <a:ext cx="9710928" cy="2029968"/>
           </a:xfrm>
           <a:prstGeom prst="roundRect">
             <a:avLst>
-              <a:gd name="adj" fmla="val 2586"/>
+              <a:gd name="adj" fmla="val 2703"/>
             </a:avLst>
           </a:prstGeom>
           <a:solidFill>
@@ -3956,8 +4014,8 @@
         </p:blipFill>
         <p:spPr>
           <a:xfrm>
-            <a:off x="1069848" y="4206240"/>
-            <a:ext cx="10058400" cy="2011680"/>
+            <a:off x="1280160" y="4160520"/>
+            <a:ext cx="9601200" cy="1920240"/>
           </a:xfrm>
           <a:prstGeom prst="rect">
             <a:avLst/>
@@ -3972,20 +4030,20 @@
         </p:nvSpPr>
         <p:spPr>
           <a:xfrm>
-            <a:off x="1069848" y="6309360"/>
-            <a:ext cx="10058400" cy="274320"/>
-          </a:xfrm>
-          <a:prstGeom prst="rect">
-            <a:avLst/>
-          </a:prstGeom>
-          <a:noFill/>
-          <a:ln/>
-        </p:spPr>
-        <p:txBody>
-          <a:bodyPr wrap="square" rtlCol="0" anchor="ctr"/>
-          <a:lstStyle/>
-          <a:p>
-            <a:pPr algn="l" indent="0" marL="0">
+            <a:off x="1280160" y="6172200"/>
+            <a:ext cx="9601200" cy="274320"/>
+          </a:xfrm>
+          <a:prstGeom prst="rect">
+            <a:avLst/>
+          </a:prstGeom>
+          <a:noFill/>
+          <a:ln/>
+        </p:spPr>
+        <p:txBody>
+          <a:bodyPr wrap="square" rtlCol="0" anchor="ctr"/>
+          <a:lstStyle/>
+          <a:p>
+            <a:pPr indent="0" marL="0">
               <a:buNone/>
             </a:pPr>
             <a:r>
@@ -4000,6 +4058,45 @@
               <a:t>SuperPlane canvas — 28 nodes across the five stages</a:t>
             </a:r>
             <a:endParaRPr lang="en-US" sz="1050" dirty="0"/>
+          </a:p>
+        </p:txBody>
+      </p:sp>
+      <p:sp>
+        <p:nvSpPr>
+          <p:cNvPr id="37" name="Text 34"/>
+          <p:cNvSpPr/>
+          <p:nvPr/>
+        </p:nvSpPr>
+        <p:spPr>
+          <a:xfrm>
+            <a:off x="8808415" y="6473952"/>
+            <a:ext cx="2743200" cy="274320"/>
+          </a:xfrm>
+          <a:prstGeom prst="rect">
+            <a:avLst/>
+          </a:prstGeom>
+          <a:noFill/>
+          <a:ln/>
+        </p:spPr>
+        <p:txBody>
+          <a:bodyPr wrap="square" rtlCol="0" anchor="ctr"/>
+          <a:lstStyle/>
+          <a:p>
+            <a:pPr algn="r" indent="0" marL="0">
+              <a:buNone/>
+            </a:pPr>
+            <a:r>
+              <a:rPr lang="en-US" sz="1000" dirty="0">
+                <a:solidFill>
+                  <a:srgbClr val="64748B"/>
+                </a:solidFill>
+                <a:latin typeface="Calibri" pitchFamily="34" charset="0"/>
+                <a:ea typeface="Calibri" pitchFamily="34" charset="-122"/>
+                <a:cs typeface="Calibri" pitchFamily="34" charset="-120"/>
+              </a:rPr>
+              <a:t>www.cubiczan.com</a:t>
+            </a:r>
+            <a:endParaRPr lang="en-US" sz="1000" dirty="0"/>
           </a:p>
         </p:txBody>
       </p:sp>
@@ -4044,7 +4141,7 @@
         <p:spPr>
           <a:xfrm>
             <a:off x="640080" y="548640"/>
-            <a:ext cx="10058400" cy="274320"/>
+            <a:ext cx="10515600" cy="274320"/>
           </a:xfrm>
           <a:prstGeom prst="rect">
             <a:avLst/>
@@ -4062,7 +4159,7 @@
             <a:r>
               <a:rPr lang="en-US" sz="1200" b="1" spc="200" kern="0" dirty="0">
                 <a:solidFill>
-                  <a:srgbClr val="0E7C86"/>
+                  <a:srgbClr val="008AFC"/>
                 </a:solidFill>
                 <a:latin typeface="Calibri" pitchFamily="34" charset="0"/>
                 <a:ea typeface="Calibri" pitchFamily="34" charset="-122"/>
@@ -4083,25 +4180,25 @@
         <p:spPr>
           <a:xfrm>
             <a:off x="640080" y="868680"/>
-            <a:ext cx="10972800" cy="640080"/>
-          </a:xfrm>
-          <a:prstGeom prst="rect">
-            <a:avLst/>
-          </a:prstGeom>
-          <a:noFill/>
-          <a:ln/>
-        </p:spPr>
-        <p:txBody>
-          <a:bodyPr wrap="square" rtlCol="0" anchor="ctr"/>
-          <a:lstStyle/>
-          <a:p>
-            <a:pPr indent="0" marL="0">
-              <a:buNone/>
-            </a:pPr>
-            <a:r>
-              <a:rPr lang="en-US" sz="2700" b="1" dirty="0">
-                <a:solidFill>
-                  <a:srgbClr val="1A2138"/>
+            <a:ext cx="10972800" cy="594360"/>
+          </a:xfrm>
+          <a:prstGeom prst="rect">
+            <a:avLst/>
+          </a:prstGeom>
+          <a:noFill/>
+          <a:ln/>
+        </p:spPr>
+        <p:txBody>
+          <a:bodyPr wrap="square" rtlCol="0" anchor="ctr"/>
+          <a:lstStyle/>
+          <a:p>
+            <a:pPr indent="0" marL="0">
+              <a:buNone/>
+            </a:pPr>
+            <a:r>
+              <a:rPr lang="en-US" sz="2600" b="1" dirty="0">
+                <a:solidFill>
+                  <a:srgbClr val="141D3D"/>
                 </a:solidFill>
                 <a:latin typeface="Calibri" pitchFamily="34" charset="0"/>
                 <a:ea typeface="Calibri" pitchFamily="34" charset="-122"/>
@@ -4109,7 +4206,7 @@
               </a:rPr>
               <a:t>SuperPlane is the orchestration backbone</a:t>
             </a:r>
-            <a:endParaRPr lang="en-US" sz="2700" dirty="0"/>
+            <a:endParaRPr lang="en-US" sz="2600" dirty="0"/>
           </a:p>
         </p:txBody>
       </p:sp>
@@ -4122,13 +4219,13 @@
         <p:spPr>
           <a:xfrm>
             <a:off x="640080" y="1783080"/>
-            <a:ext cx="566928" cy="566928"/>
+            <a:ext cx="548640" cy="548640"/>
           </a:xfrm>
           <a:prstGeom prst="ellipse">
             <a:avLst/>
           </a:prstGeom>
           <a:solidFill>
-            <a:srgbClr val="0E7C86"/>
+            <a:srgbClr val="008AFC"/>
           </a:solidFill>
           <a:ln/>
         </p:spPr>
@@ -4142,7 +4239,7 @@
         <p:spPr>
           <a:xfrm>
             <a:off x="640080" y="1783080"/>
-            <a:ext cx="566928" cy="566928"/>
+            <a:ext cx="548640" cy="548640"/>
           </a:xfrm>
           <a:prstGeom prst="rect">
             <a:avLst/>
@@ -4158,7 +4255,7 @@
               <a:buNone/>
             </a:pPr>
             <a:r>
-              <a:rPr lang="en-US" sz="1364" b="1" dirty="0">
+              <a:rPr lang="en-US" sz="1320" b="1" dirty="0">
                 <a:solidFill>
                   <a:srgbClr val="FFFFFF"/>
                 </a:solidFill>
@@ -4168,7 +4265,7 @@
               </a:rPr>
               <a:t>◆</a:t>
             </a:r>
-            <a:endParaRPr lang="en-US" sz="1364" dirty="0"/>
+            <a:endParaRPr lang="en-US" sz="1320" dirty="0"/>
           </a:p>
         </p:txBody>
       </p:sp>
@@ -4180,7 +4277,7 @@
         </p:nvSpPr>
         <p:spPr>
           <a:xfrm>
-            <a:off x="1417320" y="1764792"/>
+            <a:off x="1389888" y="1764792"/>
             <a:ext cx="4206240" cy="310896"/>
           </a:xfrm>
           <a:prstGeom prst="rect">
@@ -4199,7 +4296,7 @@
             <a:r>
               <a:rPr lang="en-US" sz="1550" b="1" dirty="0">
                 <a:solidFill>
-                  <a:srgbClr val="1A2138"/>
+                  <a:srgbClr val="141D3D"/>
                 </a:solidFill>
                 <a:latin typeface="Calibri" pitchFamily="34" charset="0"/>
                 <a:ea typeface="Calibri" pitchFamily="34" charset="-122"/>
@@ -4219,8 +4316,8 @@
         </p:nvSpPr>
         <p:spPr>
           <a:xfrm>
-            <a:off x="1417320" y="2057400"/>
-            <a:ext cx="4480560" cy="365760"/>
+            <a:off x="1389888" y="2057400"/>
+            <a:ext cx="4526280" cy="365760"/>
           </a:xfrm>
           <a:prstGeom prst="rect">
             <a:avLst/>
@@ -4258,14 +4355,14 @@
         </p:nvSpPr>
         <p:spPr>
           <a:xfrm>
-            <a:off x="640080" y="2624328"/>
-            <a:ext cx="566928" cy="566928"/>
+            <a:off x="640080" y="2606040"/>
+            <a:ext cx="548640" cy="548640"/>
           </a:xfrm>
           <a:prstGeom prst="ellipse">
             <a:avLst/>
           </a:prstGeom>
           <a:solidFill>
-            <a:srgbClr val="0E7C86"/>
+            <a:srgbClr val="25318D"/>
           </a:solidFill>
           <a:ln/>
         </p:spPr>
@@ -4278,8 +4375,8 @@
         </p:nvSpPr>
         <p:spPr>
           <a:xfrm>
-            <a:off x="640080" y="2624328"/>
-            <a:ext cx="566928" cy="566928"/>
+            <a:off x="640080" y="2606040"/>
+            <a:ext cx="548640" cy="548640"/>
           </a:xfrm>
           <a:prstGeom prst="rect">
             <a:avLst/>
@@ -4295,7 +4392,7 @@
               <a:buNone/>
             </a:pPr>
             <a:r>
-              <a:rPr lang="en-US" sz="1364" b="1" dirty="0">
+              <a:rPr lang="en-US" sz="1320" b="1" dirty="0">
                 <a:solidFill>
                   <a:srgbClr val="FFFFFF"/>
                 </a:solidFill>
@@ -4305,7 +4402,7 @@
               </a:rPr>
               <a:t>✦</a:t>
             </a:r>
-            <a:endParaRPr lang="en-US" sz="1364" dirty="0"/>
+            <a:endParaRPr lang="en-US" sz="1320" dirty="0"/>
           </a:p>
         </p:txBody>
       </p:sp>
@@ -4317,7 +4414,7 @@
         </p:nvSpPr>
         <p:spPr>
           <a:xfrm>
-            <a:off x="1417320" y="2606040"/>
+            <a:off x="1389888" y="2587752"/>
             <a:ext cx="4206240" cy="310896"/>
           </a:xfrm>
           <a:prstGeom prst="rect">
@@ -4336,7 +4433,7 @@
             <a:r>
               <a:rPr lang="en-US" sz="1550" b="1" dirty="0">
                 <a:solidFill>
-                  <a:srgbClr val="1A2138"/>
+                  <a:srgbClr val="141D3D"/>
                 </a:solidFill>
                 <a:latin typeface="Calibri" pitchFamily="34" charset="0"/>
                 <a:ea typeface="Calibri" pitchFamily="34" charset="-122"/>
@@ -4356,8 +4453,8 @@
         </p:nvSpPr>
         <p:spPr>
           <a:xfrm>
-            <a:off x="1417320" y="2898648"/>
-            <a:ext cx="4480560" cy="365760"/>
+            <a:off x="1389888" y="2880360"/>
+            <a:ext cx="4526280" cy="365760"/>
           </a:xfrm>
           <a:prstGeom prst="rect">
             <a:avLst/>
@@ -4395,14 +4492,14 @@
         </p:nvSpPr>
         <p:spPr>
           <a:xfrm>
-            <a:off x="640080" y="3465576"/>
-            <a:ext cx="566928" cy="566928"/>
+            <a:off x="640080" y="3429000"/>
+            <a:ext cx="548640" cy="548640"/>
           </a:xfrm>
           <a:prstGeom prst="ellipse">
             <a:avLst/>
           </a:prstGeom>
           <a:solidFill>
-            <a:srgbClr val="0E7C86"/>
+            <a:srgbClr val="25318D"/>
           </a:solidFill>
           <a:ln/>
         </p:spPr>
@@ -4415,8 +4512,8 @@
         </p:nvSpPr>
         <p:spPr>
           <a:xfrm>
-            <a:off x="640080" y="3465576"/>
-            <a:ext cx="566928" cy="566928"/>
+            <a:off x="640080" y="3429000"/>
+            <a:ext cx="548640" cy="548640"/>
           </a:xfrm>
           <a:prstGeom prst="rect">
             <a:avLst/>
@@ -4432,7 +4529,7 @@
               <a:buNone/>
             </a:pPr>
             <a:r>
-              <a:rPr lang="en-US" sz="1364" b="1" dirty="0">
+              <a:rPr lang="en-US" sz="1320" b="1" dirty="0">
                 <a:solidFill>
                   <a:srgbClr val="FFFFFF"/>
                 </a:solidFill>
@@ -4442,7 +4539,7 @@
               </a:rPr>
               <a:t>▣</a:t>
             </a:r>
-            <a:endParaRPr lang="en-US" sz="1364" dirty="0"/>
+            <a:endParaRPr lang="en-US" sz="1320" dirty="0"/>
           </a:p>
         </p:txBody>
       </p:sp>
@@ -4454,7 +4551,7 @@
         </p:nvSpPr>
         <p:spPr>
           <a:xfrm>
-            <a:off x="1417320" y="3447288"/>
+            <a:off x="1389888" y="3410712"/>
             <a:ext cx="4206240" cy="310896"/>
           </a:xfrm>
           <a:prstGeom prst="rect">
@@ -4473,7 +4570,7 @@
             <a:r>
               <a:rPr lang="en-US" sz="1550" b="1" dirty="0">
                 <a:solidFill>
-                  <a:srgbClr val="1A2138"/>
+                  <a:srgbClr val="141D3D"/>
                 </a:solidFill>
                 <a:latin typeface="Calibri" pitchFamily="34" charset="0"/>
                 <a:ea typeface="Calibri" pitchFamily="34" charset="-122"/>
@@ -4493,8 +4590,8 @@
         </p:nvSpPr>
         <p:spPr>
           <a:xfrm>
-            <a:off x="1417320" y="3739896"/>
-            <a:ext cx="4480560" cy="365760"/>
+            <a:off x="1389888" y="3703320"/>
+            <a:ext cx="4526280" cy="365760"/>
           </a:xfrm>
           <a:prstGeom prst="rect">
             <a:avLst/>
@@ -4532,8 +4629,8 @@
         </p:nvSpPr>
         <p:spPr>
           <a:xfrm>
-            <a:off x="640080" y="4306824"/>
-            <a:ext cx="566928" cy="566928"/>
+            <a:off x="640080" y="4251960"/>
+            <a:ext cx="548640" cy="548640"/>
           </a:xfrm>
           <a:prstGeom prst="ellipse">
             <a:avLst/>
@@ -4552,8 +4649,8 @@
         </p:nvSpPr>
         <p:spPr>
           <a:xfrm>
-            <a:off x="640080" y="4306824"/>
-            <a:ext cx="566928" cy="566928"/>
+            <a:off x="640080" y="4251960"/>
+            <a:ext cx="548640" cy="548640"/>
           </a:xfrm>
           <a:prstGeom prst="rect">
             <a:avLst/>
@@ -4569,7 +4666,7 @@
               <a:buNone/>
             </a:pPr>
             <a:r>
-              <a:rPr lang="en-US" sz="1364" b="1" dirty="0">
+              <a:rPr lang="en-US" sz="1320" b="1" dirty="0">
                 <a:solidFill>
                   <a:srgbClr val="FFFFFF"/>
                 </a:solidFill>
@@ -4579,7 +4676,7 @@
               </a:rPr>
               <a:t>🛡</a:t>
             </a:r>
-            <a:endParaRPr lang="en-US" sz="1364" dirty="0"/>
+            <a:endParaRPr lang="en-US" sz="1320" dirty="0"/>
           </a:p>
         </p:txBody>
       </p:sp>
@@ -4591,7 +4688,7 @@
         </p:nvSpPr>
         <p:spPr>
           <a:xfrm>
-            <a:off x="1417320" y="4288536"/>
+            <a:off x="1389888" y="4233672"/>
             <a:ext cx="4206240" cy="310896"/>
           </a:xfrm>
           <a:prstGeom prst="rect">
@@ -4610,7 +4707,7 @@
             <a:r>
               <a:rPr lang="en-US" sz="1550" b="1" dirty="0">
                 <a:solidFill>
-                  <a:srgbClr val="1A2138"/>
+                  <a:srgbClr val="141D3D"/>
                 </a:solidFill>
                 <a:latin typeface="Calibri" pitchFamily="34" charset="0"/>
                 <a:ea typeface="Calibri" pitchFamily="34" charset="-122"/>
@@ -4630,8 +4727,8 @@
         </p:nvSpPr>
         <p:spPr>
           <a:xfrm>
-            <a:off x="1417320" y="4581144"/>
-            <a:ext cx="4480560" cy="365760"/>
+            <a:off x="1389888" y="4526280"/>
+            <a:ext cx="4526280" cy="365760"/>
           </a:xfrm>
           <a:prstGeom prst="rect">
             <a:avLst/>
@@ -4669,14 +4766,14 @@
         </p:nvSpPr>
         <p:spPr>
           <a:xfrm>
-            <a:off x="640080" y="5148072"/>
-            <a:ext cx="566928" cy="566928"/>
+            <a:off x="640080" y="5074920"/>
+            <a:ext cx="548640" cy="548640"/>
           </a:xfrm>
           <a:prstGeom prst="ellipse">
             <a:avLst/>
           </a:prstGeom>
           <a:solidFill>
-            <a:srgbClr val="14B8A6"/>
+            <a:srgbClr val="008AFC"/>
           </a:solidFill>
           <a:ln/>
         </p:spPr>
@@ -4689,8 +4786,8 @@
         </p:nvSpPr>
         <p:spPr>
           <a:xfrm>
-            <a:off x="640080" y="5148072"/>
-            <a:ext cx="566928" cy="566928"/>
+            <a:off x="640080" y="5074920"/>
+            <a:ext cx="548640" cy="548640"/>
           </a:xfrm>
           <a:prstGeom prst="rect">
             <a:avLst/>
@@ -4706,7 +4803,7 @@
               <a:buNone/>
             </a:pPr>
             <a:r>
-              <a:rPr lang="en-US" sz="1364" b="1" dirty="0">
+              <a:rPr lang="en-US" sz="1320" b="1" dirty="0">
                 <a:solidFill>
                   <a:srgbClr val="FFFFFF"/>
                 </a:solidFill>
@@ -4716,7 +4813,7 @@
               </a:rPr>
               <a:t>▲</a:t>
             </a:r>
-            <a:endParaRPr lang="en-US" sz="1364" dirty="0"/>
+            <a:endParaRPr lang="en-US" sz="1320" dirty="0"/>
           </a:p>
         </p:txBody>
       </p:sp>
@@ -4728,7 +4825,7 @@
         </p:nvSpPr>
         <p:spPr>
           <a:xfrm>
-            <a:off x="1417320" y="5129784"/>
+            <a:off x="1389888" y="5056632"/>
             <a:ext cx="4206240" cy="310896"/>
           </a:xfrm>
           <a:prstGeom prst="rect">
@@ -4747,7 +4844,7 @@
             <a:r>
               <a:rPr lang="en-US" sz="1550" b="1" dirty="0">
                 <a:solidFill>
-                  <a:srgbClr val="1A2138"/>
+                  <a:srgbClr val="141D3D"/>
                 </a:solidFill>
                 <a:latin typeface="Calibri" pitchFamily="34" charset="0"/>
                 <a:ea typeface="Calibri" pitchFamily="34" charset="-122"/>
@@ -4767,8 +4864,8 @@
         </p:nvSpPr>
         <p:spPr>
           <a:xfrm>
-            <a:off x="1417320" y="5422392"/>
-            <a:ext cx="4480560" cy="365760"/>
+            <a:off x="1389888" y="5349240"/>
+            <a:ext cx="4526280" cy="365760"/>
           </a:xfrm>
           <a:prstGeom prst="rect">
             <a:avLst/>
@@ -4806,12 +4903,12 @@
         </p:nvSpPr>
         <p:spPr>
           <a:xfrm>
-            <a:off x="6071616" y="1773936"/>
-            <a:ext cx="5596128" cy="3538728"/>
+            <a:off x="6117336" y="1773936"/>
+            <a:ext cx="5504688" cy="3481578"/>
           </a:xfrm>
           <a:prstGeom prst="roundRect">
             <a:avLst>
-              <a:gd name="adj" fmla="val 1550"/>
+              <a:gd name="adj" fmla="val 1576"/>
             </a:avLst>
           </a:prstGeom>
           <a:solidFill>
@@ -4848,8 +4945,8 @@
         </p:blipFill>
         <p:spPr>
           <a:xfrm>
-            <a:off x="6126480" y="1828800"/>
-            <a:ext cx="5486400" cy="3429000"/>
+            <a:off x="6172200" y="1828800"/>
+            <a:ext cx="5394960" cy="3371850"/>
           </a:xfrm>
           <a:prstGeom prst="rect">
             <a:avLst/>
@@ -4864,20 +4961,20 @@
         </p:nvSpPr>
         <p:spPr>
           <a:xfrm>
-            <a:off x="6126480" y="5349240"/>
-            <a:ext cx="5486400" cy="274320"/>
-          </a:xfrm>
-          <a:prstGeom prst="rect">
-            <a:avLst/>
-          </a:prstGeom>
-          <a:noFill/>
-          <a:ln/>
-        </p:spPr>
-        <p:txBody>
-          <a:bodyPr wrap="square" rtlCol="0" anchor="ctr"/>
-          <a:lstStyle/>
-          <a:p>
-            <a:pPr algn="l" indent="0" marL="0">
+            <a:off x="6172200" y="5292090"/>
+            <a:ext cx="5394960" cy="274320"/>
+          </a:xfrm>
+          <a:prstGeom prst="rect">
+            <a:avLst/>
+          </a:prstGeom>
+          <a:noFill/>
+          <a:ln/>
+        </p:spPr>
+        <p:txBody>
+          <a:bodyPr wrap="square" rtlCol="0" anchor="ctr"/>
+          <a:lstStyle/>
+          <a:p>
+            <a:pPr indent="0" marL="0">
               <a:buNone/>
             </a:pPr>
             <a:r>
@@ -4892,6 +4989,45 @@
               <a:t>Intake detail — triggers &amp; input normalization</a:t>
             </a:r>
             <a:endParaRPr lang="en-US" sz="1050" dirty="0"/>
+          </a:p>
+        </p:txBody>
+      </p:sp>
+      <p:sp>
+        <p:nvSpPr>
+          <p:cNvPr id="27" name="Text 24"/>
+          <p:cNvSpPr/>
+          <p:nvPr/>
+        </p:nvSpPr>
+        <p:spPr>
+          <a:xfrm>
+            <a:off x="8808415" y="6473952"/>
+            <a:ext cx="2743200" cy="274320"/>
+          </a:xfrm>
+          <a:prstGeom prst="rect">
+            <a:avLst/>
+          </a:prstGeom>
+          <a:noFill/>
+          <a:ln/>
+        </p:spPr>
+        <p:txBody>
+          <a:bodyPr wrap="square" rtlCol="0" anchor="ctr"/>
+          <a:lstStyle/>
+          <a:p>
+            <a:pPr algn="r" indent="0" marL="0">
+              <a:buNone/>
+            </a:pPr>
+            <a:r>
+              <a:rPr lang="en-US" sz="1000" dirty="0">
+                <a:solidFill>
+                  <a:srgbClr val="64748B"/>
+                </a:solidFill>
+                <a:latin typeface="Calibri" pitchFamily="34" charset="0"/>
+                <a:ea typeface="Calibri" pitchFamily="34" charset="-122"/>
+                <a:cs typeface="Calibri" pitchFamily="34" charset="-120"/>
+              </a:rPr>
+              <a:t>www.cubiczan.com</a:t>
+            </a:r>
+            <a:endParaRPr lang="en-US" sz="1000" dirty="0"/>
           </a:p>
         </p:txBody>
       </p:sp>
@@ -4909,7 +5045,7 @@
     <p:bg>
       <p:bgPr>
         <a:solidFill>
-          <a:srgbClr val="0F1729"/>
+          <a:srgbClr val="0A0F1E"/>
         </a:solidFill>
       </p:bgPr>
     </p:bg>
@@ -4935,8 +5071,8 @@
         </p:nvSpPr>
         <p:spPr>
           <a:xfrm>
-            <a:off x="640080" y="548640"/>
-            <a:ext cx="10058400" cy="274320"/>
+            <a:off x="640080" y="502920"/>
+            <a:ext cx="10515600" cy="274320"/>
           </a:xfrm>
           <a:prstGeom prst="rect">
             <a:avLst/>
@@ -4954,7 +5090,7 @@
             <a:r>
               <a:rPr lang="en-US" sz="1200" b="1" spc="200" kern="0" dirty="0">
                 <a:solidFill>
-                  <a:srgbClr val="14B8A6"/>
+                  <a:srgbClr val="008AFC"/>
                 </a:solidFill>
                 <a:latin typeface="Calibri" pitchFamily="34" charset="0"/>
                 <a:ea typeface="Calibri" pitchFamily="34" charset="-122"/>
@@ -4974,24 +5110,24 @@
         </p:nvSpPr>
         <p:spPr>
           <a:xfrm>
-            <a:off x="640080" y="868680"/>
-            <a:ext cx="10972800" cy="640080"/>
-          </a:xfrm>
-          <a:prstGeom prst="rect">
-            <a:avLst/>
-          </a:prstGeom>
-          <a:noFill/>
-          <a:ln/>
-        </p:spPr>
-        <p:txBody>
-          <a:bodyPr wrap="square" rtlCol="0" anchor="ctr"/>
-          <a:lstStyle/>
-          <a:p>
-            <a:pPr indent="0" marL="0">
-              <a:buNone/>
-            </a:pPr>
-            <a:r>
-              <a:rPr lang="en-US" sz="2800" b="1" dirty="0">
+            <a:off x="640080" y="822960"/>
+            <a:ext cx="10972800" cy="594360"/>
+          </a:xfrm>
+          <a:prstGeom prst="rect">
+            <a:avLst/>
+          </a:prstGeom>
+          <a:noFill/>
+          <a:ln/>
+        </p:spPr>
+        <p:txBody>
+          <a:bodyPr wrap="square" rtlCol="0" anchor="ctr"/>
+          <a:lstStyle/>
+          <a:p>
+            <a:pPr indent="0" marL="0">
+              <a:buNone/>
+            </a:pPr>
+            <a:r>
+              <a:rPr lang="en-US" sz="2700" b="1" dirty="0">
                 <a:solidFill>
                   <a:srgbClr val="FFFFFF"/>
                 </a:solidFill>
@@ -5001,7 +5137,7 @@
               </a:rPr>
               <a:t>A MAESTRO security gate, in the loop</a:t>
             </a:r>
-            <a:endParaRPr lang="en-US" sz="2800" dirty="0"/>
+            <a:endParaRPr lang="en-US" sz="2700" dirty="0"/>
           </a:p>
         </p:txBody>
       </p:sp>
@@ -5013,7 +5149,7 @@
         </p:nvSpPr>
         <p:spPr>
           <a:xfrm>
-            <a:off x="640080" y="1600200"/>
+            <a:off x="640080" y="1554480"/>
             <a:ext cx="5486400" cy="1188720"/>
           </a:xfrm>
           <a:prstGeom prst="rect">
@@ -5069,7 +5205,7 @@
             <a:r>
               <a:rPr lang="en-US" sz="1500" b="1" dirty="0">
                 <a:solidFill>
-                  <a:srgbClr val="14B8A6"/>
+                  <a:srgbClr val="008AFC"/>
                 </a:solidFill>
                 <a:latin typeface="Calibri" pitchFamily="34" charset="0"/>
                 <a:ea typeface="Calibri" pitchFamily="34" charset="-122"/>
@@ -5092,7 +5228,7 @@
                 <a:ea typeface="Calibri" pitchFamily="34" charset="-122"/>
                 <a:cs typeface="Calibri" pitchFamily="34" charset="-120"/>
               </a:rPr>
-              <a:t> seven-layer threat model — plus STRIDE-LM and MITRE ATT&amp;CK — and gates the change at two points:</a:t>
+              <a:t> seven-layer threat model — plus STRIDE-LM and MITRE ATT&amp;CK — gating the change at two points:</a:t>
             </a:r>
             <a:endParaRPr lang="en-US" sz="1500" dirty="0"/>
           </a:p>
@@ -5106,7 +5242,7 @@
         </p:nvSpPr>
         <p:spPr>
           <a:xfrm>
-            <a:off x="640080" y="2880360"/>
+            <a:off x="640080" y="2834640"/>
             <a:ext cx="5486400" cy="1097280"/>
           </a:xfrm>
           <a:prstGeom prst="rect">
@@ -5201,7 +5337,7 @@
         </p:nvSpPr>
         <p:spPr>
           <a:xfrm>
-            <a:off x="640080" y="4297680"/>
+            <a:off x="640080" y="4160520"/>
             <a:ext cx="5486400" cy="822960"/>
           </a:xfrm>
           <a:prstGeom prst="rect">
@@ -5220,13 +5356,13 @@
             <a:r>
               <a:rPr lang="en-US" sz="1300" i="1" dirty="0">
                 <a:solidFill>
-                  <a:srgbClr val="14B8A6"/>
-                </a:solidFill>
-                <a:latin typeface="Calibri" pitchFamily="34" charset="0"/>
-                <a:ea typeface="Calibri" pitchFamily="34" charset="-122"/>
-                <a:cs typeface="Calibri" pitchFamily="34" charset="-120"/>
-              </a:rPr>
-              <a:t>“Trust-boundary validation between layers is the most common, most dangerous gap.”</a:t>
+                  <a:srgbClr val="008AFC"/>
+                </a:solidFill>
+                <a:latin typeface="Calibri" pitchFamily="34" charset="0"/>
+                <a:ea typeface="Calibri" pitchFamily="34" charset="-122"/>
+                <a:cs typeface="Calibri" pitchFamily="34" charset="-120"/>
+              </a:rPr>
+              <a:t>"Trust-boundary validation between layers is the most common, most dangerous gap."</a:t>
             </a:r>
             <a:endParaRPr lang="en-US" sz="1300" dirty="0"/>
           </a:p>
@@ -5240,16 +5376,16 @@
         </p:nvSpPr>
         <p:spPr>
           <a:xfrm>
-            <a:off x="6492240" y="1600200"/>
-            <a:ext cx="5029200" cy="4663440"/>
+            <a:off x="6492240" y="1554480"/>
+            <a:ext cx="5029200" cy="4572000"/>
           </a:xfrm>
           <a:prstGeom prst="roundRect">
             <a:avLst>
-              <a:gd name="adj" fmla="val 1961"/>
+              <a:gd name="adj" fmla="val 2000"/>
             </a:avLst>
           </a:prstGeom>
           <a:solidFill>
-            <a:srgbClr val="1B2742"/>
+            <a:srgbClr val="161D33"/>
           </a:solidFill>
           <a:ln w="12700">
             <a:solidFill>
@@ -5267,7 +5403,7 @@
         </p:nvSpPr>
         <p:spPr>
           <a:xfrm>
-            <a:off x="6766560" y="1783080"/>
+            <a:off x="6766560" y="1737360"/>
             <a:ext cx="4572000" cy="365760"/>
           </a:xfrm>
           <a:prstGeom prst="rect">
@@ -5306,7 +5442,7 @@
         </p:nvSpPr>
         <p:spPr>
           <a:xfrm>
-            <a:off x="6766560" y="2240280"/>
+            <a:off x="6766560" y="2194560"/>
             <a:ext cx="365760" cy="457200"/>
           </a:xfrm>
           <a:prstGeom prst="rect">
@@ -5345,7 +5481,7 @@
         </p:nvSpPr>
         <p:spPr>
           <a:xfrm>
-            <a:off x="7223760" y="2240280"/>
+            <a:off x="7223760" y="2194560"/>
             <a:ext cx="4114800" cy="457200"/>
           </a:xfrm>
           <a:prstGeom prst="rect">
@@ -5398,7 +5534,7 @@
         </p:nvSpPr>
         <p:spPr>
           <a:xfrm>
-            <a:off x="6766560" y="2752344"/>
+            <a:off x="6766560" y="2697480"/>
             <a:ext cx="365760" cy="457200"/>
           </a:xfrm>
           <a:prstGeom prst="rect">
@@ -5437,7 +5573,7 @@
         </p:nvSpPr>
         <p:spPr>
           <a:xfrm>
-            <a:off x="7223760" y="2752344"/>
+            <a:off x="7223760" y="2697480"/>
             <a:ext cx="4114800" cy="457200"/>
           </a:xfrm>
           <a:prstGeom prst="rect">
@@ -5490,7 +5626,7 @@
         </p:nvSpPr>
         <p:spPr>
           <a:xfrm>
-            <a:off x="6766560" y="3264408"/>
+            <a:off x="6766560" y="3200400"/>
             <a:ext cx="365760" cy="457200"/>
           </a:xfrm>
           <a:prstGeom prst="rect">
@@ -5529,7 +5665,7 @@
         </p:nvSpPr>
         <p:spPr>
           <a:xfrm>
-            <a:off x="7223760" y="3264408"/>
+            <a:off x="7223760" y="3200400"/>
             <a:ext cx="4114800" cy="457200"/>
           </a:xfrm>
           <a:prstGeom prst="rect">
@@ -5582,7 +5718,7 @@
         </p:nvSpPr>
         <p:spPr>
           <a:xfrm>
-            <a:off x="6766560" y="3776472"/>
+            <a:off x="6766560" y="3703320"/>
             <a:ext cx="365760" cy="457200"/>
           </a:xfrm>
           <a:prstGeom prst="rect">
@@ -5621,7 +5757,7 @@
         </p:nvSpPr>
         <p:spPr>
           <a:xfrm>
-            <a:off x="7223760" y="3776472"/>
+            <a:off x="7223760" y="3703320"/>
             <a:ext cx="4114800" cy="457200"/>
           </a:xfrm>
           <a:prstGeom prst="rect">
@@ -5674,7 +5810,7 @@
         </p:nvSpPr>
         <p:spPr>
           <a:xfrm>
-            <a:off x="6766560" y="4288536"/>
+            <a:off x="6766560" y="4206240"/>
             <a:ext cx="365760" cy="457200"/>
           </a:xfrm>
           <a:prstGeom prst="rect">
@@ -5713,7 +5849,7 @@
         </p:nvSpPr>
         <p:spPr>
           <a:xfrm>
-            <a:off x="7223760" y="4288536"/>
+            <a:off x="7223760" y="4206240"/>
             <a:ext cx="4114800" cy="457200"/>
           </a:xfrm>
           <a:prstGeom prst="rect">
@@ -5766,7 +5902,7 @@
         </p:nvSpPr>
         <p:spPr>
           <a:xfrm>
-            <a:off x="6766560" y="4800600"/>
+            <a:off x="6766560" y="4709160"/>
             <a:ext cx="365760" cy="457200"/>
           </a:xfrm>
           <a:prstGeom prst="rect">
@@ -5805,7 +5941,7 @@
         </p:nvSpPr>
         <p:spPr>
           <a:xfrm>
-            <a:off x="7223760" y="4800600"/>
+            <a:off x="7223760" y="4709160"/>
             <a:ext cx="4114800" cy="457200"/>
           </a:xfrm>
           <a:prstGeom prst="rect">
@@ -5858,7 +5994,7 @@
         </p:nvSpPr>
         <p:spPr>
           <a:xfrm>
-            <a:off x="6766560" y="5312664"/>
+            <a:off x="6766560" y="5212080"/>
             <a:ext cx="365760" cy="457200"/>
           </a:xfrm>
           <a:prstGeom prst="rect">
@@ -5897,7 +6033,7 @@
         </p:nvSpPr>
         <p:spPr>
           <a:xfrm>
-            <a:off x="7223760" y="5312664"/>
+            <a:off x="7223760" y="5212080"/>
             <a:ext cx="4114800" cy="457200"/>
           </a:xfrm>
           <a:prstGeom prst="rect">
@@ -5950,8 +6086,8 @@
         </p:nvSpPr>
         <p:spPr>
           <a:xfrm>
-            <a:off x="6766560" y="5843016"/>
-            <a:ext cx="4572000" cy="365760"/>
+            <a:off x="6766560" y="5733288"/>
+            <a:ext cx="4572000" cy="320040"/>
           </a:xfrm>
           <a:prstGeom prst="rect">
             <a:avLst/>
@@ -5969,7 +6105,7 @@
             <a:r>
               <a:rPr lang="en-US" sz="1100" i="1" dirty="0">
                 <a:solidFill>
-                  <a:srgbClr val="14B8A6"/>
+                  <a:srgbClr val="008AFC"/>
                 </a:solidFill>
                 <a:latin typeface="Calibri" pitchFamily="34" charset="0"/>
                 <a:ea typeface="Calibri" pitchFamily="34" charset="-122"/>
@@ -5978,6 +6114,45 @@
               <a:t>Layers 1–4 are where this factory lives — and where the gate focuses.</a:t>
             </a:r>
             <a:endParaRPr lang="en-US" sz="1100" dirty="0"/>
+          </a:p>
+        </p:txBody>
+      </p:sp>
+      <p:sp>
+        <p:nvSpPr>
+          <p:cNvPr id="24" name="Text 22"/>
+          <p:cNvSpPr/>
+          <p:nvPr/>
+        </p:nvSpPr>
+        <p:spPr>
+          <a:xfrm>
+            <a:off x="8808415" y="6473952"/>
+            <a:ext cx="2743200" cy="274320"/>
+          </a:xfrm>
+          <a:prstGeom prst="rect">
+            <a:avLst/>
+          </a:prstGeom>
+          <a:noFill/>
+          <a:ln/>
+        </p:spPr>
+        <p:txBody>
+          <a:bodyPr wrap="square" rtlCol="0" anchor="ctr"/>
+          <a:lstStyle/>
+          <a:p>
+            <a:pPr algn="r" indent="0" marL="0">
+              <a:buNone/>
+            </a:pPr>
+            <a:r>
+              <a:rPr lang="en-US" sz="1000" dirty="0">
+                <a:solidFill>
+                  <a:srgbClr val="6E7EA0"/>
+                </a:solidFill>
+                <a:latin typeface="Calibri" pitchFamily="34" charset="0"/>
+                <a:ea typeface="Calibri" pitchFamily="34" charset="-122"/>
+                <a:cs typeface="Calibri" pitchFamily="34" charset="-120"/>
+              </a:rPr>
+              <a:t>www.cubiczan.com</a:t>
+            </a:r>
+            <a:endParaRPr lang="en-US" sz="1000" dirty="0"/>
           </a:p>
         </p:txBody>
       </p:sp>
@@ -6022,7 +6197,7 @@
         <p:spPr>
           <a:xfrm>
             <a:off x="640080" y="548640"/>
-            <a:ext cx="10058400" cy="274320"/>
+            <a:ext cx="10515600" cy="274320"/>
           </a:xfrm>
           <a:prstGeom prst="rect">
             <a:avLst/>
@@ -6040,7 +6215,7 @@
             <a:r>
               <a:rPr lang="en-US" sz="1200" b="1" spc="200" kern="0" dirty="0">
                 <a:solidFill>
-                  <a:srgbClr val="0E7C86"/>
+                  <a:srgbClr val="008AFC"/>
                 </a:solidFill>
                 <a:latin typeface="Calibri" pitchFamily="34" charset="0"/>
                 <a:ea typeface="Calibri" pitchFamily="34" charset="-122"/>
@@ -6061,25 +6236,25 @@
         <p:spPr>
           <a:xfrm>
             <a:off x="640080" y="868680"/>
-            <a:ext cx="10972800" cy="640080"/>
-          </a:xfrm>
-          <a:prstGeom prst="rect">
-            <a:avLst/>
-          </a:prstGeom>
-          <a:noFill/>
-          <a:ln/>
-        </p:spPr>
-        <p:txBody>
-          <a:bodyPr wrap="square" rtlCol="0" anchor="ctr"/>
-          <a:lstStyle/>
-          <a:p>
-            <a:pPr indent="0" marL="0">
-              <a:buNone/>
-            </a:pPr>
-            <a:r>
-              <a:rPr lang="en-US" sz="2700" b="1" dirty="0">
-                <a:solidFill>
-                  <a:srgbClr val="1A2138"/>
+            <a:ext cx="10972800" cy="594360"/>
+          </a:xfrm>
+          <a:prstGeom prst="rect">
+            <a:avLst/>
+          </a:prstGeom>
+          <a:noFill/>
+          <a:ln/>
+        </p:spPr>
+        <p:txBody>
+          <a:bodyPr wrap="square" rtlCol="0" anchor="ctr"/>
+          <a:lstStyle/>
+          <a:p>
+            <a:pPr indent="0" marL="0">
+              <a:buNone/>
+            </a:pPr>
+            <a:r>
+              <a:rPr lang="en-US" sz="2600" b="1" dirty="0">
+                <a:solidFill>
+                  <a:srgbClr val="141D3D"/>
                 </a:solidFill>
                 <a:latin typeface="Calibri" pitchFamily="34" charset="0"/>
                 <a:ea typeface="Calibri" pitchFamily="34" charset="-122"/>
@@ -6087,7 +6262,7 @@
               </a:rPr>
               <a:t>Live on Render, deployed from the factory</a:t>
             </a:r>
-            <a:endParaRPr lang="en-US" sz="2700" dirty="0"/>
+            <a:endParaRPr lang="en-US" sz="2600" dirty="0"/>
           </a:p>
         </p:txBody>
       </p:sp>
@@ -6099,7 +6274,7 @@
         </p:nvSpPr>
         <p:spPr>
           <a:xfrm>
-            <a:off x="585216" y="1682496"/>
+            <a:off x="585216" y="1636776"/>
             <a:ext cx="5138928" cy="3252978"/>
           </a:xfrm>
           <a:prstGeom prst="roundRect">
@@ -6141,7 +6316,7 @@
         </p:blipFill>
         <p:spPr>
           <a:xfrm>
-            <a:off x="640080" y="1737360"/>
+            <a:off x="640080" y="1691640"/>
             <a:ext cx="5029200" cy="3143250"/>
           </a:xfrm>
           <a:prstGeom prst="rect">
@@ -6157,7 +6332,7 @@
         </p:nvSpPr>
         <p:spPr>
           <a:xfrm>
-            <a:off x="640080" y="4972050"/>
+            <a:off x="640080" y="4926330"/>
             <a:ext cx="5029200" cy="274320"/>
           </a:xfrm>
           <a:prstGeom prst="rect">
@@ -6170,7 +6345,7 @@
           <a:bodyPr wrap="square" rtlCol="0" anchor="ctr"/>
           <a:lstStyle/>
           <a:p>
-            <a:pPr algn="l" indent="0" marL="0">
+            <a:pPr indent="0" marL="0">
               <a:buNone/>
             </a:pPr>
             <a:r>
@@ -6196,7 +6371,7 @@
         </p:nvSpPr>
         <p:spPr>
           <a:xfrm>
-            <a:off x="6300216" y="1682496"/>
+            <a:off x="6300216" y="1636776"/>
             <a:ext cx="5138928" cy="3252978"/>
           </a:xfrm>
           <a:prstGeom prst="roundRect">
@@ -6238,7 +6413,7 @@
         </p:blipFill>
         <p:spPr>
           <a:xfrm>
-            <a:off x="6355080" y="1737360"/>
+            <a:off x="6355080" y="1691640"/>
             <a:ext cx="5029200" cy="3143250"/>
           </a:xfrm>
           <a:prstGeom prst="rect">
@@ -6254,7 +6429,7 @@
         </p:nvSpPr>
         <p:spPr>
           <a:xfrm>
-            <a:off x="6355080" y="4972050"/>
+            <a:off x="6355080" y="4926330"/>
             <a:ext cx="5029200" cy="274320"/>
           </a:xfrm>
           <a:prstGeom prst="rect">
@@ -6267,7 +6442,7 @@
           <a:bodyPr wrap="square" rtlCol="0" anchor="ctr"/>
           <a:lstStyle/>
           <a:p>
-            <a:pPr algn="l" indent="0" marL="0">
+            <a:pPr indent="0" marL="0">
               <a:buNone/>
             </a:pPr>
             <a:r>
@@ -6293,26 +6468,26 @@
         </p:nvSpPr>
         <p:spPr>
           <a:xfrm>
-            <a:off x="640080" y="5532120"/>
-            <a:ext cx="2560320" cy="640080"/>
-          </a:xfrm>
-          <a:prstGeom prst="rect">
-            <a:avLst/>
-          </a:prstGeom>
-          <a:noFill/>
-          <a:ln/>
-        </p:spPr>
-        <p:txBody>
-          <a:bodyPr wrap="square" rtlCol="0" anchor="ctr"/>
-          <a:lstStyle/>
-          <a:p>
-            <a:pPr indent="0" marL="0">
-              <a:buNone/>
-            </a:pPr>
-            <a:r>
-              <a:rPr lang="en-US" sz="3200" b="1" dirty="0">
-                <a:solidFill>
-                  <a:srgbClr val="0E7C86"/>
+            <a:off x="640080" y="5486400"/>
+            <a:ext cx="2560320" cy="594360"/>
+          </a:xfrm>
+          <a:prstGeom prst="rect">
+            <a:avLst/>
+          </a:prstGeom>
+          <a:noFill/>
+          <a:ln/>
+        </p:spPr>
+        <p:txBody>
+          <a:bodyPr wrap="square" rtlCol="0" anchor="ctr"/>
+          <a:lstStyle/>
+          <a:p>
+            <a:pPr indent="0" marL="0">
+              <a:buNone/>
+            </a:pPr>
+            <a:r>
+              <a:rPr lang="en-US" sz="3100" b="1" dirty="0">
+                <a:solidFill>
+                  <a:srgbClr val="008AFC"/>
                 </a:solidFill>
                 <a:latin typeface="Calibri" pitchFamily="34" charset="0"/>
                 <a:ea typeface="Calibri" pitchFamily="34" charset="-122"/>
@@ -6320,7 +6495,7 @@
               </a:rPr>
               <a:t>28</a:t>
             </a:r>
-            <a:endParaRPr lang="en-US" sz="3200" dirty="0"/>
+            <a:endParaRPr lang="en-US" sz="3100" dirty="0"/>
           </a:p>
         </p:txBody>
       </p:sp>
@@ -6332,7 +6507,7 @@
         </p:nvSpPr>
         <p:spPr>
           <a:xfrm>
-            <a:off x="640080" y="6144768"/>
+            <a:off x="640080" y="6053328"/>
             <a:ext cx="2560320" cy="365760"/>
           </a:xfrm>
           <a:prstGeom prst="rect">
@@ -6371,26 +6546,26 @@
         </p:nvSpPr>
         <p:spPr>
           <a:xfrm>
-            <a:off x="3429000" y="5532120"/>
-            <a:ext cx="2560320" cy="640080"/>
-          </a:xfrm>
-          <a:prstGeom prst="rect">
-            <a:avLst/>
-          </a:prstGeom>
-          <a:noFill/>
-          <a:ln/>
-        </p:spPr>
-        <p:txBody>
-          <a:bodyPr wrap="square" rtlCol="0" anchor="ctr"/>
-          <a:lstStyle/>
-          <a:p>
-            <a:pPr indent="0" marL="0">
-              <a:buNone/>
-            </a:pPr>
-            <a:r>
-              <a:rPr lang="en-US" sz="3200" b="1" dirty="0">
-                <a:solidFill>
-                  <a:srgbClr val="14B8A6"/>
+            <a:off x="3429000" y="5486400"/>
+            <a:ext cx="2560320" cy="594360"/>
+          </a:xfrm>
+          <a:prstGeom prst="rect">
+            <a:avLst/>
+          </a:prstGeom>
+          <a:noFill/>
+          <a:ln/>
+        </p:spPr>
+        <p:txBody>
+          <a:bodyPr wrap="square" rtlCol="0" anchor="ctr"/>
+          <a:lstStyle/>
+          <a:p>
+            <a:pPr indent="0" marL="0">
+              <a:buNone/>
+            </a:pPr>
+            <a:r>
+              <a:rPr lang="en-US" sz="3100" b="1" dirty="0">
+                <a:solidFill>
+                  <a:srgbClr val="25318D"/>
                 </a:solidFill>
                 <a:latin typeface="Calibri" pitchFamily="34" charset="0"/>
                 <a:ea typeface="Calibri" pitchFamily="34" charset="-122"/>
@@ -6398,7 +6573,7 @@
               </a:rPr>
               <a:t>0 / 0</a:t>
             </a:r>
-            <a:endParaRPr lang="en-US" sz="3200" dirty="0"/>
+            <a:endParaRPr lang="en-US" sz="3100" dirty="0"/>
           </a:p>
         </p:txBody>
       </p:sp>
@@ -6410,7 +6585,7 @@
         </p:nvSpPr>
         <p:spPr>
           <a:xfrm>
-            <a:off x="3429000" y="6144768"/>
+            <a:off x="3429000" y="6053328"/>
             <a:ext cx="2560320" cy="365760"/>
           </a:xfrm>
           <a:prstGeom prst="rect">
@@ -6449,26 +6624,26 @@
         </p:nvSpPr>
         <p:spPr>
           <a:xfrm>
-            <a:off x="6217920" y="5532120"/>
-            <a:ext cx="2560320" cy="640080"/>
-          </a:xfrm>
-          <a:prstGeom prst="rect">
-            <a:avLst/>
-          </a:prstGeom>
-          <a:noFill/>
-          <a:ln/>
-        </p:spPr>
-        <p:txBody>
-          <a:bodyPr wrap="square" rtlCol="0" anchor="ctr"/>
-          <a:lstStyle/>
-          <a:p>
-            <a:pPr indent="0" marL="0">
-              <a:buNone/>
-            </a:pPr>
-            <a:r>
-              <a:rPr lang="en-US" sz="3200" b="1" dirty="0">
-                <a:solidFill>
-                  <a:srgbClr val="0E7C86"/>
+            <a:off x="6217920" y="5486400"/>
+            <a:ext cx="2560320" cy="594360"/>
+          </a:xfrm>
+          <a:prstGeom prst="rect">
+            <a:avLst/>
+          </a:prstGeom>
+          <a:noFill/>
+          <a:ln/>
+        </p:spPr>
+        <p:txBody>
+          <a:bodyPr wrap="square" rtlCol="0" anchor="ctr"/>
+          <a:lstStyle/>
+          <a:p>
+            <a:pPr indent="0" marL="0">
+              <a:buNone/>
+            </a:pPr>
+            <a:r>
+              <a:rPr lang="en-US" sz="3100" b="1" dirty="0">
+                <a:solidFill>
+                  <a:srgbClr val="008AFC"/>
                 </a:solidFill>
                 <a:latin typeface="Calibri" pitchFamily="34" charset="0"/>
                 <a:ea typeface="Calibri" pitchFamily="34" charset="-122"/>
@@ -6476,7 +6651,7 @@
               </a:rPr>
               <a:t>5</a:t>
             </a:r>
-            <a:endParaRPr lang="en-US" sz="3200" dirty="0"/>
+            <a:endParaRPr lang="en-US" sz="3100" dirty="0"/>
           </a:p>
         </p:txBody>
       </p:sp>
@@ -6488,7 +6663,7 @@
         </p:nvSpPr>
         <p:spPr>
           <a:xfrm>
-            <a:off x="6217920" y="6144768"/>
+            <a:off x="6217920" y="6053328"/>
             <a:ext cx="2560320" cy="365760"/>
           </a:xfrm>
           <a:prstGeom prst="rect">
@@ -6527,24 +6702,24 @@
         </p:nvSpPr>
         <p:spPr>
           <a:xfrm>
-            <a:off x="9006840" y="5532120"/>
-            <a:ext cx="2560320" cy="640080"/>
-          </a:xfrm>
-          <a:prstGeom prst="rect">
-            <a:avLst/>
-          </a:prstGeom>
-          <a:noFill/>
-          <a:ln/>
-        </p:spPr>
-        <p:txBody>
-          <a:bodyPr wrap="square" rtlCol="0" anchor="ctr"/>
-          <a:lstStyle/>
-          <a:p>
-            <a:pPr indent="0" marL="0">
-              <a:buNone/>
-            </a:pPr>
-            <a:r>
-              <a:rPr lang="en-US" sz="3200" b="1" dirty="0">
+            <a:off x="9006840" y="5486400"/>
+            <a:ext cx="2560320" cy="594360"/>
+          </a:xfrm>
+          <a:prstGeom prst="rect">
+            <a:avLst/>
+          </a:prstGeom>
+          <a:noFill/>
+          <a:ln/>
+        </p:spPr>
+        <p:txBody>
+          <a:bodyPr wrap="square" rtlCol="0" anchor="ctr"/>
+          <a:lstStyle/>
+          <a:p>
+            <a:pPr indent="0" marL="0">
+              <a:buNone/>
+            </a:pPr>
+            <a:r>
+              <a:rPr lang="en-US" sz="3100" b="1" dirty="0">
                 <a:solidFill>
                   <a:srgbClr val="D97706"/>
                 </a:solidFill>
@@ -6554,7 +6729,7 @@
               </a:rPr>
               <a:t>3</a:t>
             </a:r>
-            <a:endParaRPr lang="en-US" sz="3200" dirty="0"/>
+            <a:endParaRPr lang="en-US" sz="3100" dirty="0"/>
           </a:p>
         </p:txBody>
       </p:sp>
@@ -6566,7 +6741,7 @@
         </p:nvSpPr>
         <p:spPr>
           <a:xfrm>
-            <a:off x="9006840" y="6144768"/>
+            <a:off x="9006840" y="6053328"/>
             <a:ext cx="2560320" cy="365760"/>
           </a:xfrm>
           <a:prstGeom prst="rect">
@@ -6638,7 +6813,7 @@
         <p:spPr>
           <a:xfrm>
             <a:off x="640080" y="548640"/>
-            <a:ext cx="10058400" cy="274320"/>
+            <a:ext cx="10515600" cy="274320"/>
           </a:xfrm>
           <a:prstGeom prst="rect">
             <a:avLst/>
@@ -6656,7 +6831,7 @@
             <a:r>
               <a:rPr lang="en-US" sz="1200" b="1" spc="200" kern="0" dirty="0">
                 <a:solidFill>
-                  <a:srgbClr val="0E7C86"/>
+                  <a:srgbClr val="008AFC"/>
                 </a:solidFill>
                 <a:latin typeface="Calibri" pitchFamily="34" charset="0"/>
                 <a:ea typeface="Calibri" pitchFamily="34" charset="-122"/>
@@ -6677,25 +6852,25 @@
         <p:spPr>
           <a:xfrm>
             <a:off x="640080" y="868680"/>
-            <a:ext cx="10972800" cy="640080"/>
-          </a:xfrm>
-          <a:prstGeom prst="rect">
-            <a:avLst/>
-          </a:prstGeom>
-          <a:noFill/>
-          <a:ln/>
-        </p:spPr>
-        <p:txBody>
-          <a:bodyPr wrap="square" rtlCol="0" anchor="ctr"/>
-          <a:lstStyle/>
-          <a:p>
-            <a:pPr indent="0" marL="0">
-              <a:buNone/>
-            </a:pPr>
-            <a:r>
-              <a:rPr lang="en-US" sz="2700" b="1" dirty="0">
-                <a:solidFill>
-                  <a:srgbClr val="1A2138"/>
+            <a:ext cx="10972800" cy="594360"/>
+          </a:xfrm>
+          <a:prstGeom prst="rect">
+            <a:avLst/>
+          </a:prstGeom>
+          <a:noFill/>
+          <a:ln/>
+        </p:spPr>
+        <p:txBody>
+          <a:bodyPr wrap="square" rtlCol="0" anchor="ctr"/>
+          <a:lstStyle/>
+          <a:p>
+            <a:pPr indent="0" marL="0">
+              <a:buNone/>
+            </a:pPr>
+            <a:r>
+              <a:rPr lang="en-US" sz="2600" b="1" dirty="0">
+                <a:solidFill>
+                  <a:srgbClr val="141D3D"/>
                 </a:solidFill>
                 <a:latin typeface="Calibri" pitchFamily="34" charset="0"/>
                 <a:ea typeface="Calibri" pitchFamily="34" charset="-122"/>
@@ -6703,7 +6878,7 @@
               </a:rPr>
               <a:t>Building with SuperPlane</a:t>
             </a:r>
-            <a:endParaRPr lang="en-US" sz="2700" dirty="0"/>
+            <a:endParaRPr lang="en-US" sz="2600" dirty="0"/>
           </a:p>
         </p:txBody>
       </p:sp>
@@ -6715,8 +6890,8 @@
         </p:nvSpPr>
         <p:spPr>
           <a:xfrm>
-            <a:off x="640080" y="1828800"/>
-            <a:ext cx="3520440" cy="4206240"/>
+            <a:off x="640080" y="1783080"/>
+            <a:ext cx="3520440" cy="4114800"/>
           </a:xfrm>
           <a:prstGeom prst="roundRect">
             <a:avLst>
@@ -6724,7 +6899,7 @@
             </a:avLst>
           </a:prstGeom>
           <a:solidFill>
-            <a:srgbClr val="F1F5F9"/>
+            <a:srgbClr val="F2F5FA"/>
           </a:solidFill>
           <a:ln w="12700">
             <a:solidFill>
@@ -6742,7 +6917,7 @@
         </p:nvSpPr>
         <p:spPr>
           <a:xfrm>
-            <a:off x="914400" y="2057400"/>
+            <a:off x="914400" y="2011680"/>
             <a:ext cx="3017520" cy="457200"/>
           </a:xfrm>
           <a:prstGeom prst="rect">
@@ -6761,7 +6936,7 @@
             <a:r>
               <a:rPr lang="en-US" sz="1600" b="1" dirty="0">
                 <a:solidFill>
-                  <a:srgbClr val="14B8A6"/>
+                  <a:srgbClr val="008AFC"/>
                 </a:solidFill>
                 <a:latin typeface="Calibri" pitchFamily="34" charset="0"/>
                 <a:ea typeface="Calibri" pitchFamily="34" charset="-122"/>
@@ -6781,8 +6956,8 @@
         </p:nvSpPr>
         <p:spPr>
           <a:xfrm>
-            <a:off x="914400" y="2606040"/>
-            <a:ext cx="3017520" cy="3291840"/>
+            <a:off x="914400" y="2560320"/>
+            <a:ext cx="3017520" cy="3200400"/>
           </a:xfrm>
           <a:prstGeom prst="rect">
             <a:avLst/>
@@ -6815,136 +6990,8 @@
               </a:rPr>
               <a:t>Canvas made a complex multi-tool agentic pipeline legible</a:t>
             </a:r>
-            <a:pPr indent="0" marL="0">
-              <a:lnSpc>
-                <a:spcPct val="110000"/>
-              </a:lnSpc>
-              <a:spcAft>
-                <a:spcPts val="800"/>
-              </a:spcAft>
-              <a:buNone/>
-            </a:pPr>
-            <a:r>
-              <a:rPr lang="en-US" sz="1250" dirty="0">
-                <a:solidFill>
-                  <a:srgbClr val="33405A"/>
-                </a:solidFill>
-                <a:latin typeface="Calibri" pitchFamily="34" charset="0"/>
-                <a:ea typeface="Calibri" pitchFamily="34" charset="-122"/>
-                <a:cs typeface="Calibri" pitchFamily="34" charset="-120"/>
-              </a:rPr>
-              <a:t>Integrations (GitHub/OpenAI/Daytona/Render) wired in one place</a:t>
-            </a:r>
-            <a:pPr indent="0" marL="0">
-              <a:lnSpc>
-                <a:spcPct val="110000"/>
-              </a:lnSpc>
-              <a:spcAft>
-                <a:spcPts val="800"/>
-              </a:spcAft>
-              <a:buNone/>
-            </a:pPr>
-            <a:r>
-              <a:rPr lang="en-US" sz="1250" dirty="0">
-                <a:solidFill>
-                  <a:srgbClr val="33405A"/>
-                </a:solidFill>
-                <a:latin typeface="Calibri" pitchFamily="34" charset="0"/>
-                <a:ea typeface="Calibri" pitchFamily="34" charset="-122"/>
-                <a:cs typeface="Calibri" pitchFamily="34" charset="-120"/>
-              </a:rPr>
-              <a:t>Gates + human approval as first-class nodes</a:t>
-            </a:r>
             <a:endParaRPr lang="en-US" sz="1250" dirty="0"/>
           </a:p>
-        </p:txBody>
-      </p:sp>
-      <p:sp>
-        <p:nvSpPr>
-          <p:cNvPr id="7" name="Shape 5"/>
-          <p:cNvSpPr/>
-          <p:nvPr/>
-        </p:nvSpPr>
-        <p:spPr>
-          <a:xfrm>
-            <a:off x="4343400" y="1828800"/>
-            <a:ext cx="3520440" cy="4206240"/>
-          </a:xfrm>
-          <a:prstGeom prst="roundRect">
-            <a:avLst>
-              <a:gd name="adj" fmla="val 2597"/>
-            </a:avLst>
-          </a:prstGeom>
-          <a:solidFill>
-            <a:srgbClr val="F1F5F9"/>
-          </a:solidFill>
-          <a:ln w="12700">
-            <a:solidFill>
-              <a:srgbClr val="D8E0EA"/>
-            </a:solidFill>
-            <a:prstDash val="solid"/>
-          </a:ln>
-        </p:spPr>
-      </p:sp>
-      <p:sp>
-        <p:nvSpPr>
-          <p:cNvPr id="8" name="Text 6"/>
-          <p:cNvSpPr/>
-          <p:nvPr/>
-        </p:nvSpPr>
-        <p:spPr>
-          <a:xfrm>
-            <a:off x="4617720" y="2057400"/>
-            <a:ext cx="3017520" cy="457200"/>
-          </a:xfrm>
-          <a:prstGeom prst="rect">
-            <a:avLst/>
-          </a:prstGeom>
-          <a:noFill/>
-          <a:ln/>
-        </p:spPr>
-        <p:txBody>
-          <a:bodyPr wrap="square" rtlCol="0" anchor="ctr"/>
-          <a:lstStyle/>
-          <a:p>
-            <a:pPr indent="0" marL="0">
-              <a:buNone/>
-            </a:pPr>
-            <a:r>
-              <a:rPr lang="en-US" sz="1600" b="1" dirty="0">
-                <a:solidFill>
-                  <a:srgbClr val="D97706"/>
-                </a:solidFill>
-                <a:latin typeface="Calibri" pitchFamily="34" charset="0"/>
-                <a:ea typeface="Calibri" pitchFamily="34" charset="-122"/>
-                <a:cs typeface="Calibri" pitchFamily="34" charset="-120"/>
-              </a:rPr>
-              <a:t>⚠  3 biggest issues</a:t>
-            </a:r>
-            <a:endParaRPr lang="en-US" sz="1600" dirty="0"/>
-          </a:p>
-        </p:txBody>
-      </p:sp>
-      <p:sp>
-        <p:nvSpPr>
-          <p:cNvPr id="9" name="Text 7"/>
-          <p:cNvSpPr/>
-          <p:nvPr/>
-        </p:nvSpPr>
-        <p:spPr>
-          <a:xfrm>
-            <a:off x="4617720" y="2606040"/>
-            <a:ext cx="3017520" cy="3291840"/>
-          </a:xfrm>
-          <a:prstGeom prst="rect">
-            <a:avLst/>
-          </a:prstGeom>
-          <a:noFill/>
-          <a:ln/>
-        </p:spPr>
-        <p:txBody>
-          <a:bodyPr wrap="square" rtlCol="0" anchor="ctr"/>
-          <a:lstStyle/>
           <a:p>
             <a:pPr marL="177800" indent="-177800">
               <a:lnSpc>
@@ -6965,138 +7012,10 @@
                 <a:ea typeface="Calibri" pitchFamily="34" charset="-122"/>
                 <a:cs typeface="Calibri" pitchFamily="34" charset="-120"/>
               </a:rPr>
-              <a:t>Draft → publish is opaque (no drafts publish; publish = canvas update w/o --draft-id)</a:t>
-            </a:r>
-            <a:pPr indent="0" marL="0">
-              <a:lnSpc>
-                <a:spcPct val="110000"/>
-              </a:lnSpc>
-              <a:spcAft>
-                <a:spcPts val="800"/>
-              </a:spcAft>
-              <a:buNone/>
-            </a:pPr>
-            <a:r>
-              <a:rPr lang="en-US" sz="1250" dirty="0">
-                <a:solidFill>
-                  <a:srgbClr val="33405A"/>
-                </a:solidFill>
-                <a:latin typeface="Calibri" pitchFamily="34" charset="0"/>
-                <a:ea typeface="Calibri" pitchFamily="34" charset="-122"/>
-                <a:cs typeface="Calibri" pitchFamily="34" charset="-120"/>
-              </a:rPr>
-              <a:t>Integration &amp; service IDs hand-patched into canvas.yaml; stale values persist</a:t>
-            </a:r>
-            <a:pPr indent="0" marL="0">
-              <a:lnSpc>
-                <a:spcPct val="110000"/>
-              </a:lnSpc>
-              <a:spcAft>
-                <a:spcPts val="800"/>
-              </a:spcAft>
-              <a:buNone/>
-            </a:pPr>
-            <a:r>
-              <a:rPr lang="en-US" sz="1250" dirty="0">
-                <a:solidFill>
-                  <a:srgbClr val="33405A"/>
-                </a:solidFill>
-                <a:latin typeface="Calibri" pitchFamily="34" charset="0"/>
-                <a:ea typeface="Calibri" pitchFamily="34" charset="-122"/>
-                <a:cs typeface="Calibri" pitchFamily="34" charset="-120"/>
-              </a:rPr>
-              <a:t>Weak edit-time feedback — secret/integration nodes show no green/clear state</a:t>
+              <a:t>Integrations (GitHub/OpenAI/Daytona/Render) wired in one place</a:t>
             </a:r>
             <a:endParaRPr lang="en-US" sz="1250" dirty="0"/>
           </a:p>
-        </p:txBody>
-      </p:sp>
-      <p:sp>
-        <p:nvSpPr>
-          <p:cNvPr id="10" name="Shape 8"/>
-          <p:cNvSpPr/>
-          <p:nvPr/>
-        </p:nvSpPr>
-        <p:spPr>
-          <a:xfrm>
-            <a:off x="8046720" y="1828800"/>
-            <a:ext cx="3520440" cy="4206240"/>
-          </a:xfrm>
-          <a:prstGeom prst="roundRect">
-            <a:avLst>
-              <a:gd name="adj" fmla="val 2597"/>
-            </a:avLst>
-          </a:prstGeom>
-          <a:solidFill>
-            <a:srgbClr val="F1F5F9"/>
-          </a:solidFill>
-          <a:ln w="12700">
-            <a:solidFill>
-              <a:srgbClr val="D8E0EA"/>
-            </a:solidFill>
-            <a:prstDash val="solid"/>
-          </a:ln>
-        </p:spPr>
-      </p:sp>
-      <p:sp>
-        <p:nvSpPr>
-          <p:cNvPr id="11" name="Text 9"/>
-          <p:cNvSpPr/>
-          <p:nvPr/>
-        </p:nvSpPr>
-        <p:spPr>
-          <a:xfrm>
-            <a:off x="8321040" y="2057400"/>
-            <a:ext cx="3017520" cy="457200"/>
-          </a:xfrm>
-          <a:prstGeom prst="rect">
-            <a:avLst/>
-          </a:prstGeom>
-          <a:noFill/>
-          <a:ln/>
-        </p:spPr>
-        <p:txBody>
-          <a:bodyPr wrap="square" rtlCol="0" anchor="ctr"/>
-          <a:lstStyle/>
-          <a:p>
-            <a:pPr indent="0" marL="0">
-              <a:buNone/>
-            </a:pPr>
-            <a:r>
-              <a:rPr lang="en-US" sz="1600" b="1" dirty="0">
-                <a:solidFill>
-                  <a:srgbClr val="0E7C86"/>
-                </a:solidFill>
-                <a:latin typeface="Calibri" pitchFamily="34" charset="0"/>
-                <a:ea typeface="Calibri" pitchFamily="34" charset="-122"/>
-                <a:cs typeface="Calibri" pitchFamily="34" charset="-120"/>
-              </a:rPr>
-              <a:t>→  Suggestions</a:t>
-            </a:r>
-            <a:endParaRPr lang="en-US" sz="1600" dirty="0"/>
-          </a:p>
-        </p:txBody>
-      </p:sp>
-      <p:sp>
-        <p:nvSpPr>
-          <p:cNvPr id="12" name="Text 10"/>
-          <p:cNvSpPr/>
-          <p:nvPr/>
-        </p:nvSpPr>
-        <p:spPr>
-          <a:xfrm>
-            <a:off x="8321040" y="2606040"/>
-            <a:ext cx="3017520" cy="3291840"/>
-          </a:xfrm>
-          <a:prstGeom prst="rect">
-            <a:avLst/>
-          </a:prstGeom>
-          <a:noFill/>
-          <a:ln/>
-        </p:spPr>
-        <p:txBody>
-          <a:bodyPr wrap="square" rtlCol="0" anchor="ctr"/>
-          <a:lstStyle/>
           <a:p>
             <a:pPr marL="177800" indent="-177800">
               <a:lnSpc>
@@ -7117,16 +7036,108 @@
                 <a:ea typeface="Calibri" pitchFamily="34" charset="-122"/>
                 <a:cs typeface="Calibri" pitchFamily="34" charset="-120"/>
               </a:rPr>
-              <a:t>First-class drafts publish + live-vs-draft diff</a:t>
-            </a:r>
-            <a:pPr indent="0" marL="0">
+              <a:t>Gates + human approval as first-class nodes</a:t>
+            </a:r>
+            <a:endParaRPr lang="en-US" sz="1250" dirty="0"/>
+          </a:p>
+        </p:txBody>
+      </p:sp>
+      <p:sp>
+        <p:nvSpPr>
+          <p:cNvPr id="7" name="Shape 5"/>
+          <p:cNvSpPr/>
+          <p:nvPr/>
+        </p:nvSpPr>
+        <p:spPr>
+          <a:xfrm>
+            <a:off x="4343400" y="1783080"/>
+            <a:ext cx="3520440" cy="4114800"/>
+          </a:xfrm>
+          <a:prstGeom prst="roundRect">
+            <a:avLst>
+              <a:gd name="adj" fmla="val 2597"/>
+            </a:avLst>
+          </a:prstGeom>
+          <a:solidFill>
+            <a:srgbClr val="F2F5FA"/>
+          </a:solidFill>
+          <a:ln w="12700">
+            <a:solidFill>
+              <a:srgbClr val="D8E0EA"/>
+            </a:solidFill>
+            <a:prstDash val="solid"/>
+          </a:ln>
+        </p:spPr>
+      </p:sp>
+      <p:sp>
+        <p:nvSpPr>
+          <p:cNvPr id="8" name="Text 6"/>
+          <p:cNvSpPr/>
+          <p:nvPr/>
+        </p:nvSpPr>
+        <p:spPr>
+          <a:xfrm>
+            <a:off x="4617720" y="2011680"/>
+            <a:ext cx="3017520" cy="457200"/>
+          </a:xfrm>
+          <a:prstGeom prst="rect">
+            <a:avLst/>
+          </a:prstGeom>
+          <a:noFill/>
+          <a:ln/>
+        </p:spPr>
+        <p:txBody>
+          <a:bodyPr wrap="square" rtlCol="0" anchor="ctr"/>
+          <a:lstStyle/>
+          <a:p>
+            <a:pPr indent="0" marL="0">
+              <a:buNone/>
+            </a:pPr>
+            <a:r>
+              <a:rPr lang="en-US" sz="1600" b="1" dirty="0">
+                <a:solidFill>
+                  <a:srgbClr val="D97706"/>
+                </a:solidFill>
+                <a:latin typeface="Calibri" pitchFamily="34" charset="0"/>
+                <a:ea typeface="Calibri" pitchFamily="34" charset="-122"/>
+                <a:cs typeface="Calibri" pitchFamily="34" charset="-120"/>
+              </a:rPr>
+              <a:t>⚠  3 biggest issues</a:t>
+            </a:r>
+            <a:endParaRPr lang="en-US" sz="1600" dirty="0"/>
+          </a:p>
+        </p:txBody>
+      </p:sp>
+      <p:sp>
+        <p:nvSpPr>
+          <p:cNvPr id="9" name="Text 7"/>
+          <p:cNvSpPr/>
+          <p:nvPr/>
+        </p:nvSpPr>
+        <p:spPr>
+          <a:xfrm>
+            <a:off x="4617720" y="2560320"/>
+            <a:ext cx="3017520" cy="3200400"/>
+          </a:xfrm>
+          <a:prstGeom prst="rect">
+            <a:avLst/>
+          </a:prstGeom>
+          <a:noFill/>
+          <a:ln/>
+        </p:spPr>
+        <p:txBody>
+          <a:bodyPr wrap="square" rtlCol="0" anchor="ctr"/>
+          <a:lstStyle/>
+          <a:p>
+            <a:pPr marL="177800" indent="-177800">
               <a:lnSpc>
                 <a:spcPct val="110000"/>
               </a:lnSpc>
               <a:spcAft>
                 <a:spcPts val="800"/>
               </a:spcAft>
-              <a:buNone/>
+              <a:buSzPct val="100000"/>
+              <a:buChar char="•"/>
             </a:pPr>
             <a:r>
               <a:rPr lang="en-US" sz="1250" dirty="0">
@@ -7137,16 +7148,20 @@
                 <a:ea typeface="Calibri" pitchFamily="34" charset="-122"/>
                 <a:cs typeface="Calibri" pitchFamily="34" charset="-120"/>
               </a:rPr>
-              <a:t>Native param substitution (canvas update --set key=val)</a:t>
-            </a:r>
-            <a:pPr indent="0" marL="0">
+              <a:t>Draft → publish is opaque (no drafts publish; publish = canvas update w/o --draft-id)</a:t>
+            </a:r>
+            <a:endParaRPr lang="en-US" sz="1250" dirty="0"/>
+          </a:p>
+          <a:p>
+            <a:pPr marL="177800" indent="-177800">
               <a:lnSpc>
                 <a:spcPct val="110000"/>
               </a:lnSpc>
               <a:spcAft>
                 <a:spcPts val="800"/>
               </a:spcAft>
-              <a:buNone/>
+              <a:buSzPct val="100000"/>
+              <a:buChar char="•"/>
             </a:pPr>
             <a:r>
               <a:rPr lang="en-US" sz="1250" dirty="0">
@@ -7157,16 +7172,20 @@
                 <a:ea typeface="Calibri" pitchFamily="34" charset="-122"/>
                 <a:cs typeface="Calibri" pitchFamily="34" charset="-120"/>
               </a:rPr>
-              <a:t>Node errors that name the missing integration/secret</a:t>
-            </a:r>
-            <a:pPr indent="0" marL="0">
+              <a:t>Integration &amp; service IDs hand-patched into canvas.yaml; stale values persist</a:t>
+            </a:r>
+            <a:endParaRPr lang="en-US" sz="1250" dirty="0"/>
+          </a:p>
+          <a:p>
+            <a:pPr marL="177800" indent="-177800">
               <a:lnSpc>
                 <a:spcPct val="110000"/>
               </a:lnSpc>
               <a:spcAft>
                 <a:spcPts val="800"/>
               </a:spcAft>
-              <a:buNone/>
+              <a:buSzPct val="100000"/>
+              <a:buChar char="•"/>
             </a:pPr>
             <a:r>
               <a:rPr lang="en-US" sz="1250" dirty="0">
@@ -7177,9 +7196,232 @@
                 <a:ea typeface="Calibri" pitchFamily="34" charset="-122"/>
                 <a:cs typeface="Calibri" pitchFamily="34" charset="-120"/>
               </a:rPr>
+              <a:t>Weak edit-time feedback — secret/integration nodes show no clear state</a:t>
+            </a:r>
+            <a:endParaRPr lang="en-US" sz="1250" dirty="0"/>
+          </a:p>
+        </p:txBody>
+      </p:sp>
+      <p:sp>
+        <p:nvSpPr>
+          <p:cNvPr id="10" name="Shape 8"/>
+          <p:cNvSpPr/>
+          <p:nvPr/>
+        </p:nvSpPr>
+        <p:spPr>
+          <a:xfrm>
+            <a:off x="8046720" y="1783080"/>
+            <a:ext cx="3520440" cy="4114800"/>
+          </a:xfrm>
+          <a:prstGeom prst="roundRect">
+            <a:avLst>
+              <a:gd name="adj" fmla="val 2597"/>
+            </a:avLst>
+          </a:prstGeom>
+          <a:solidFill>
+            <a:srgbClr val="F2F5FA"/>
+          </a:solidFill>
+          <a:ln w="12700">
+            <a:solidFill>
+              <a:srgbClr val="D8E0EA"/>
+            </a:solidFill>
+            <a:prstDash val="solid"/>
+          </a:ln>
+        </p:spPr>
+      </p:sp>
+      <p:sp>
+        <p:nvSpPr>
+          <p:cNvPr id="11" name="Text 9"/>
+          <p:cNvSpPr/>
+          <p:nvPr/>
+        </p:nvSpPr>
+        <p:spPr>
+          <a:xfrm>
+            <a:off x="8321040" y="2011680"/>
+            <a:ext cx="3017520" cy="457200"/>
+          </a:xfrm>
+          <a:prstGeom prst="rect">
+            <a:avLst/>
+          </a:prstGeom>
+          <a:noFill/>
+          <a:ln/>
+        </p:spPr>
+        <p:txBody>
+          <a:bodyPr wrap="square" rtlCol="0" anchor="ctr"/>
+          <a:lstStyle/>
+          <a:p>
+            <a:pPr indent="0" marL="0">
+              <a:buNone/>
+            </a:pPr>
+            <a:r>
+              <a:rPr lang="en-US" sz="1600" b="1" dirty="0">
+                <a:solidFill>
+                  <a:srgbClr val="25318D"/>
+                </a:solidFill>
+                <a:latin typeface="Calibri" pitchFamily="34" charset="0"/>
+                <a:ea typeface="Calibri" pitchFamily="34" charset="-122"/>
+                <a:cs typeface="Calibri" pitchFamily="34" charset="-120"/>
+              </a:rPr>
+              <a:t>→  Suggestions</a:t>
+            </a:r>
+            <a:endParaRPr lang="en-US" sz="1600" dirty="0"/>
+          </a:p>
+        </p:txBody>
+      </p:sp>
+      <p:sp>
+        <p:nvSpPr>
+          <p:cNvPr id="12" name="Text 10"/>
+          <p:cNvSpPr/>
+          <p:nvPr/>
+        </p:nvSpPr>
+        <p:spPr>
+          <a:xfrm>
+            <a:off x="8321040" y="2560320"/>
+            <a:ext cx="3017520" cy="3200400"/>
+          </a:xfrm>
+          <a:prstGeom prst="rect">
+            <a:avLst/>
+          </a:prstGeom>
+          <a:noFill/>
+          <a:ln/>
+        </p:spPr>
+        <p:txBody>
+          <a:bodyPr wrap="square" rtlCol="0" anchor="ctr"/>
+          <a:lstStyle/>
+          <a:p>
+            <a:pPr marL="177800" indent="-177800">
+              <a:lnSpc>
+                <a:spcPct val="110000"/>
+              </a:lnSpc>
+              <a:spcAft>
+                <a:spcPts val="800"/>
+              </a:spcAft>
+              <a:buSzPct val="100000"/>
+              <a:buChar char="•"/>
+            </a:pPr>
+            <a:r>
+              <a:rPr lang="en-US" sz="1250" dirty="0">
+                <a:solidFill>
+                  <a:srgbClr val="33405A"/>
+                </a:solidFill>
+                <a:latin typeface="Calibri" pitchFamily="34" charset="0"/>
+                <a:ea typeface="Calibri" pitchFamily="34" charset="-122"/>
+                <a:cs typeface="Calibri" pitchFamily="34" charset="-120"/>
+              </a:rPr>
+              <a:t>First-class drafts publish + live-vs-draft diff</a:t>
+            </a:r>
+            <a:endParaRPr lang="en-US" sz="1250" dirty="0"/>
+          </a:p>
+          <a:p>
+            <a:pPr marL="177800" indent="-177800">
+              <a:lnSpc>
+                <a:spcPct val="110000"/>
+              </a:lnSpc>
+              <a:spcAft>
+                <a:spcPts val="800"/>
+              </a:spcAft>
+              <a:buSzPct val="100000"/>
+              <a:buChar char="•"/>
+            </a:pPr>
+            <a:r>
+              <a:rPr lang="en-US" sz="1250" dirty="0">
+                <a:solidFill>
+                  <a:srgbClr val="33405A"/>
+                </a:solidFill>
+                <a:latin typeface="Calibri" pitchFamily="34" charset="0"/>
+                <a:ea typeface="Calibri" pitchFamily="34" charset="-122"/>
+                <a:cs typeface="Calibri" pitchFamily="34" charset="-120"/>
+              </a:rPr>
+              <a:t>Native param substitution (canvas update --set key=val)</a:t>
+            </a:r>
+            <a:endParaRPr lang="en-US" sz="1250" dirty="0"/>
+          </a:p>
+          <a:p>
+            <a:pPr marL="177800" indent="-177800">
+              <a:lnSpc>
+                <a:spcPct val="110000"/>
+              </a:lnSpc>
+              <a:spcAft>
+                <a:spcPts val="800"/>
+              </a:spcAft>
+              <a:buSzPct val="100000"/>
+              <a:buChar char="•"/>
+            </a:pPr>
+            <a:r>
+              <a:rPr lang="en-US" sz="1250" dirty="0">
+                <a:solidFill>
+                  <a:srgbClr val="33405A"/>
+                </a:solidFill>
+                <a:latin typeface="Calibri" pitchFamily="34" charset="0"/>
+                <a:ea typeface="Calibri" pitchFamily="34" charset="-122"/>
+                <a:cs typeface="Calibri" pitchFamily="34" charset="-120"/>
+              </a:rPr>
+              <a:t>Node errors that name the missing integration/secret</a:t>
+            </a:r>
+            <a:endParaRPr lang="en-US" sz="1250" dirty="0"/>
+          </a:p>
+          <a:p>
+            <a:pPr marL="177800" indent="-177800">
+              <a:lnSpc>
+                <a:spcPct val="110000"/>
+              </a:lnSpc>
+              <a:spcAft>
+                <a:spcPts val="800"/>
+              </a:spcAft>
+              <a:buSzPct val="100000"/>
+              <a:buChar char="•"/>
+            </a:pPr>
+            <a:r>
+              <a:rPr lang="en-US" sz="1250" dirty="0">
+                <a:solidFill>
+                  <a:srgbClr val="33405A"/>
+                </a:solidFill>
+                <a:latin typeface="Calibri" pitchFamily="34" charset="0"/>
+                <a:ea typeface="Calibri" pitchFamily="34" charset="-122"/>
+                <a:cs typeface="Calibri" pitchFamily="34" charset="-120"/>
+              </a:rPr>
               <a:t>One-click canvas export for docs</a:t>
             </a:r>
             <a:endParaRPr lang="en-US" sz="1250" dirty="0"/>
+          </a:p>
+        </p:txBody>
+      </p:sp>
+      <p:sp>
+        <p:nvSpPr>
+          <p:cNvPr id="13" name="Text 11"/>
+          <p:cNvSpPr/>
+          <p:nvPr/>
+        </p:nvSpPr>
+        <p:spPr>
+          <a:xfrm>
+            <a:off x="8808415" y="6473952"/>
+            <a:ext cx="2743200" cy="274320"/>
+          </a:xfrm>
+          <a:prstGeom prst="rect">
+            <a:avLst/>
+          </a:prstGeom>
+          <a:noFill/>
+          <a:ln/>
+        </p:spPr>
+        <p:txBody>
+          <a:bodyPr wrap="square" rtlCol="0" anchor="ctr"/>
+          <a:lstStyle/>
+          <a:p>
+            <a:pPr algn="r" indent="0" marL="0">
+              <a:buNone/>
+            </a:pPr>
+            <a:r>
+              <a:rPr lang="en-US" sz="1000" dirty="0">
+                <a:solidFill>
+                  <a:srgbClr val="64748B"/>
+                </a:solidFill>
+                <a:latin typeface="Calibri" pitchFamily="34" charset="0"/>
+                <a:ea typeface="Calibri" pitchFamily="34" charset="-122"/>
+                <a:cs typeface="Calibri" pitchFamily="34" charset="-120"/>
+              </a:rPr>
+              <a:t>www.cubiczan.com</a:t>
+            </a:r>
+            <a:endParaRPr lang="en-US" sz="1000" dirty="0"/>
           </a:p>
         </p:txBody>
       </p:sp>
@@ -7197,7 +7439,7 @@
     <p:bg>
       <p:bgPr>
         <a:solidFill>
-          <a:srgbClr val="0F1729"/>
+          <a:srgbClr val="0A0F1E"/>
         </a:solidFill>
       </p:bgPr>
     </p:bg>
@@ -7215,32 +7457,56 @@
           <a:chExt cx="0" cy="0"/>
         </a:xfrm>
       </p:grpSpPr>
-      <p:sp>
-        <p:nvSpPr>
-          <p:cNvPr id="2" name="Text 0"/>
-          <p:cNvSpPr/>
-          <p:nvPr/>
-        </p:nvSpPr>
-        <p:spPr>
-          <a:xfrm>
-            <a:off x="640080" y="1828800"/>
-            <a:ext cx="10972800" cy="822960"/>
-          </a:xfrm>
-          <a:prstGeom prst="rect">
-            <a:avLst/>
-          </a:prstGeom>
-          <a:noFill/>
-          <a:ln/>
-        </p:spPr>
-        <p:txBody>
-          <a:bodyPr wrap="square" rtlCol="0" anchor="ctr"/>
-          <a:lstStyle/>
-          <a:p>
-            <a:pPr indent="0" marL="0">
-              <a:buNone/>
-            </a:pPr>
-            <a:r>
-              <a:rPr lang="en-US" sz="3400" b="1" dirty="0">
+      <p:pic>
+        <p:nvPicPr>
+          <p:cNvPr id="2" name="Image 0" descr="/tmp/cubiczan-logo.png">    </p:cNvPr>
+          <p:cNvPicPr>
+            <a:picLocks noChangeAspect="1"/>
+          </p:cNvPicPr>
+          <p:nvPr/>
+        </p:nvPicPr>
+        <p:blipFill>
+          <a:blip r:embed="rId1"/>
+          <a:stretch>
+            <a:fillRect/>
+          </a:stretch>
+        </p:blipFill>
+        <p:spPr>
+          <a:xfrm>
+            <a:off x="640080" y="731520"/>
+            <a:ext cx="2377440" cy="1380744"/>
+          </a:xfrm>
+          <a:prstGeom prst="rect">
+            <a:avLst/>
+          </a:prstGeom>
+        </p:spPr>
+      </p:pic>
+      <p:sp>
+        <p:nvSpPr>
+          <p:cNvPr id="3" name="Text 0"/>
+          <p:cNvSpPr/>
+          <p:nvPr/>
+        </p:nvSpPr>
+        <p:spPr>
+          <a:xfrm>
+            <a:off x="640080" y="2331720"/>
+            <a:ext cx="10972800" cy="731520"/>
+          </a:xfrm>
+          <a:prstGeom prst="rect">
+            <a:avLst/>
+          </a:prstGeom>
+          <a:noFill/>
+          <a:ln/>
+        </p:spPr>
+        <p:txBody>
+          <a:bodyPr wrap="square" rtlCol="0" anchor="ctr"/>
+          <a:lstStyle/>
+          <a:p>
+            <a:pPr indent="0" marL="0">
+              <a:buNone/>
+            </a:pPr>
+            <a:r>
+              <a:rPr lang="en-US" sz="3200" b="1" dirty="0">
                 <a:solidFill>
                   <a:srgbClr val="FFFFFF"/>
                 </a:solidFill>
@@ -7248,21 +7514,21 @@
                 <a:ea typeface="Calibri" pitchFamily="34" charset="-122"/>
                 <a:cs typeface="Calibri" pitchFamily="34" charset="-120"/>
               </a:rPr>
-              <a:t>Cubiczan — SuperPlane Software Factory</a:t>
-            </a:r>
-            <a:endParaRPr lang="en-US" sz="3400" dirty="0"/>
-          </a:p>
-        </p:txBody>
-      </p:sp>
-      <p:sp>
-        <p:nvSpPr>
-          <p:cNvPr id="3" name="Text 1"/>
-          <p:cNvSpPr/>
-          <p:nvPr/>
-        </p:nvSpPr>
-        <p:spPr>
-          <a:xfrm>
-            <a:off x="640080" y="2697480"/>
+              <a:t>SuperPlane Software Factory</a:t>
+            </a:r>
+            <a:endParaRPr lang="en-US" sz="3200" dirty="0"/>
+          </a:p>
+        </p:txBody>
+      </p:sp>
+      <p:sp>
+        <p:nvSpPr>
+          <p:cNvPr id="4" name="Text 1"/>
+          <p:cNvSpPr/>
+          <p:nvPr/>
+        </p:nvSpPr>
+        <p:spPr>
+          <a:xfrm>
+            <a:off x="640080" y="3108960"/>
             <a:ext cx="10972800" cy="457200"/>
           </a:xfrm>
           <a:prstGeom prst="rect">
@@ -7279,7 +7545,7 @@
               <a:buNone/>
             </a:pPr>
             <a:r>
-              <a:rPr lang="en-US" sz="1700" dirty="0">
+              <a:rPr lang="en-US" sz="1600" dirty="0">
                 <a:solidFill>
                   <a:srgbClr val="CADCFC"/>
                 </a:solidFill>
@@ -7287,42 +7553,42 @@
                 <a:ea typeface="Calibri" pitchFamily="34" charset="-122"/>
                 <a:cs typeface="Calibri" pitchFamily="34" charset="-120"/>
               </a:rPr>
-              <a:t>Idea → spec → code → MAESTRO gate → live PR preview. Orchestrated end-to-end on SuperPlane.</a:t>
-            </a:r>
-            <a:endParaRPr lang="en-US" sz="1700" dirty="0"/>
-          </a:p>
-        </p:txBody>
-      </p:sp>
-      <p:sp>
-        <p:nvSpPr>
-          <p:cNvPr id="4" name="Shape 2"/>
-          <p:cNvSpPr/>
-          <p:nvPr/>
-        </p:nvSpPr>
-        <p:spPr>
-          <a:xfrm>
-            <a:off x="640080" y="3566160"/>
-            <a:ext cx="457200" cy="457200"/>
+              <a:t>Idea → spec → code → MAESTRO gate → live PR preview, orchestrated end-to-end on SuperPlane.</a:t>
+            </a:r>
+            <a:endParaRPr lang="en-US" sz="1600" dirty="0"/>
+          </a:p>
+        </p:txBody>
+      </p:sp>
+      <p:sp>
+        <p:nvSpPr>
+          <p:cNvPr id="5" name="Shape 2"/>
+          <p:cNvSpPr/>
+          <p:nvPr/>
+        </p:nvSpPr>
+        <p:spPr>
+          <a:xfrm>
+            <a:off x="640080" y="3840480"/>
+            <a:ext cx="420624" cy="420624"/>
           </a:xfrm>
           <a:prstGeom prst="ellipse">
             <a:avLst/>
           </a:prstGeom>
           <a:solidFill>
-            <a:srgbClr val="1B2742"/>
+            <a:srgbClr val="161D33"/>
           </a:solidFill>
           <a:ln/>
         </p:spPr>
       </p:sp>
       <p:sp>
         <p:nvSpPr>
-          <p:cNvPr id="5" name="Text 3"/>
-          <p:cNvSpPr/>
-          <p:nvPr/>
-        </p:nvSpPr>
-        <p:spPr>
-          <a:xfrm>
-            <a:off x="640080" y="3566160"/>
-            <a:ext cx="457200" cy="457200"/>
+          <p:cNvPr id="6" name="Text 3"/>
+          <p:cNvSpPr/>
+          <p:nvPr/>
+        </p:nvSpPr>
+        <p:spPr>
+          <a:xfrm>
+            <a:off x="640080" y="3840480"/>
+            <a:ext cx="420624" cy="420624"/>
           </a:xfrm>
           <a:prstGeom prst="rect">
             <a:avLst/>
@@ -7338,9 +7604,9 @@
               <a:buNone/>
             </a:pPr>
             <a:r>
-              <a:rPr lang="en-US" sz="1100" b="1" dirty="0">
-                <a:solidFill>
-                  <a:srgbClr val="14B8A6"/>
+              <a:rPr lang="en-US" sz="1012" b="1" dirty="0">
+                <a:solidFill>
+                  <a:srgbClr val="008AFC"/>
                 </a:solidFill>
                 <a:latin typeface="Calibri" pitchFamily="34" charset="0"/>
                 <a:ea typeface="Calibri" pitchFamily="34" charset="-122"/>
@@ -7348,36 +7614,36 @@
               </a:rPr>
               <a:t>↗</a:t>
             </a:r>
-            <a:endParaRPr lang="en-US" sz="1100" dirty="0"/>
-          </a:p>
-        </p:txBody>
-      </p:sp>
-      <p:sp>
-        <p:nvSpPr>
-          <p:cNvPr id="6" name="Text 4"/>
-          <p:cNvSpPr/>
-          <p:nvPr/>
-        </p:nvSpPr>
-        <p:spPr>
-          <a:xfrm>
-            <a:off x="1325880" y="3566160"/>
-            <a:ext cx="10058400" cy="457200"/>
-          </a:xfrm>
-          <a:prstGeom prst="rect">
-            <a:avLst/>
-          </a:prstGeom>
-          <a:noFill/>
-          <a:ln/>
-        </p:spPr>
-        <p:txBody>
-          <a:bodyPr wrap="square" rtlCol="0" anchor="ctr"/>
-          <a:lstStyle/>
-          <a:p>
-            <a:pPr indent="0" marL="0">
-              <a:buNone/>
-            </a:pPr>
-            <a:r>
-              <a:rPr lang="en-US" sz="1500" b="1" dirty="0">
+            <a:endParaRPr lang="en-US" sz="1012" dirty="0"/>
+          </a:p>
+        </p:txBody>
+      </p:sp>
+      <p:sp>
+        <p:nvSpPr>
+          <p:cNvPr id="7" name="Text 4"/>
+          <p:cNvSpPr/>
+          <p:nvPr/>
+        </p:nvSpPr>
+        <p:spPr>
+          <a:xfrm>
+            <a:off x="1280160" y="3840480"/>
+            <a:ext cx="10058400" cy="420624"/>
+          </a:xfrm>
+          <a:prstGeom prst="rect">
+            <a:avLst/>
+          </a:prstGeom>
+          <a:noFill/>
+          <a:ln/>
+        </p:spPr>
+        <p:txBody>
+          <a:bodyPr wrap="square" rtlCol="0" anchor="ctr"/>
+          <a:lstStyle/>
+          <a:p>
+            <a:pPr indent="0" marL="0">
+              <a:buNone/>
+            </a:pPr>
+            <a:r>
+              <a:rPr lang="en-US" sz="1450" b="1" dirty="0">
                 <a:solidFill>
                   <a:srgbClr val="FFFFFF"/>
                 </a:solidFill>
@@ -7391,7 +7657,7 @@
               <a:buNone/>
             </a:pPr>
             <a:r>
-              <a:rPr lang="en-US" sz="1500" dirty="0">
+              <a:rPr lang="en-US" sz="1450" dirty="0">
                 <a:solidFill>
                   <a:srgbClr val="CADCFC"/>
                 </a:solidFill>
@@ -7401,40 +7667,40 @@
               </a:rPr>
               <a:t>app.superplane.com → Software Factory</a:t>
             </a:r>
-            <a:endParaRPr lang="en-US" sz="1500" dirty="0"/>
-          </a:p>
-        </p:txBody>
-      </p:sp>
-      <p:sp>
-        <p:nvSpPr>
-          <p:cNvPr id="7" name="Shape 5"/>
-          <p:cNvSpPr/>
-          <p:nvPr/>
-        </p:nvSpPr>
-        <p:spPr>
-          <a:xfrm>
-            <a:off x="640080" y="4206240"/>
-            <a:ext cx="457200" cy="457200"/>
+            <a:endParaRPr lang="en-US" sz="1450" dirty="0"/>
+          </a:p>
+        </p:txBody>
+      </p:sp>
+      <p:sp>
+        <p:nvSpPr>
+          <p:cNvPr id="8" name="Shape 5"/>
+          <p:cNvSpPr/>
+          <p:nvPr/>
+        </p:nvSpPr>
+        <p:spPr>
+          <a:xfrm>
+            <a:off x="640080" y="4407408"/>
+            <a:ext cx="420624" cy="420624"/>
           </a:xfrm>
           <a:prstGeom prst="ellipse">
             <a:avLst/>
           </a:prstGeom>
           <a:solidFill>
-            <a:srgbClr val="1B2742"/>
+            <a:srgbClr val="161D33"/>
           </a:solidFill>
           <a:ln/>
         </p:spPr>
       </p:sp>
       <p:sp>
         <p:nvSpPr>
-          <p:cNvPr id="8" name="Text 6"/>
-          <p:cNvSpPr/>
-          <p:nvPr/>
-        </p:nvSpPr>
-        <p:spPr>
-          <a:xfrm>
-            <a:off x="640080" y="4206240"/>
-            <a:ext cx="457200" cy="457200"/>
+          <p:cNvPr id="9" name="Text 6"/>
+          <p:cNvSpPr/>
+          <p:nvPr/>
+        </p:nvSpPr>
+        <p:spPr>
+          <a:xfrm>
+            <a:off x="640080" y="4407408"/>
+            <a:ext cx="420624" cy="420624"/>
           </a:xfrm>
           <a:prstGeom prst="rect">
             <a:avLst/>
@@ -7450,9 +7716,9 @@
               <a:buNone/>
             </a:pPr>
             <a:r>
-              <a:rPr lang="en-US" sz="1100" b="1" dirty="0">
-                <a:solidFill>
-                  <a:srgbClr val="14B8A6"/>
+              <a:rPr lang="en-US" sz="1012" b="1" dirty="0">
+                <a:solidFill>
+                  <a:srgbClr val="008AFC"/>
                 </a:solidFill>
                 <a:latin typeface="Calibri" pitchFamily="34" charset="0"/>
                 <a:ea typeface="Calibri" pitchFamily="34" charset="-122"/>
@@ -7460,36 +7726,36 @@
               </a:rPr>
               <a:t>↗</a:t>
             </a:r>
-            <a:endParaRPr lang="en-US" sz="1100" dirty="0"/>
-          </a:p>
-        </p:txBody>
-      </p:sp>
-      <p:sp>
-        <p:nvSpPr>
-          <p:cNvPr id="9" name="Text 7"/>
-          <p:cNvSpPr/>
-          <p:nvPr/>
-        </p:nvSpPr>
-        <p:spPr>
-          <a:xfrm>
-            <a:off x="1325880" y="4206240"/>
-            <a:ext cx="10058400" cy="457200"/>
-          </a:xfrm>
-          <a:prstGeom prst="rect">
-            <a:avLst/>
-          </a:prstGeom>
-          <a:noFill/>
-          <a:ln/>
-        </p:spPr>
-        <p:txBody>
-          <a:bodyPr wrap="square" rtlCol="0" anchor="ctr"/>
-          <a:lstStyle/>
-          <a:p>
-            <a:pPr indent="0" marL="0">
-              <a:buNone/>
-            </a:pPr>
-            <a:r>
-              <a:rPr lang="en-US" sz="1500" b="1" dirty="0">
+            <a:endParaRPr lang="en-US" sz="1012" dirty="0"/>
+          </a:p>
+        </p:txBody>
+      </p:sp>
+      <p:sp>
+        <p:nvSpPr>
+          <p:cNvPr id="10" name="Text 7"/>
+          <p:cNvSpPr/>
+          <p:nvPr/>
+        </p:nvSpPr>
+        <p:spPr>
+          <a:xfrm>
+            <a:off x="1280160" y="4407408"/>
+            <a:ext cx="10058400" cy="420624"/>
+          </a:xfrm>
+          <a:prstGeom prst="rect">
+            <a:avLst/>
+          </a:prstGeom>
+          <a:noFill/>
+          <a:ln/>
+        </p:spPr>
+        <p:txBody>
+          <a:bodyPr wrap="square" rtlCol="0" anchor="ctr"/>
+          <a:lstStyle/>
+          <a:p>
+            <a:pPr indent="0" marL="0">
+              <a:buNone/>
+            </a:pPr>
+            <a:r>
+              <a:rPr lang="en-US" sz="1450" b="1" dirty="0">
                 <a:solidFill>
                   <a:srgbClr val="FFFFFF"/>
                 </a:solidFill>
@@ -7503,7 +7769,7 @@
               <a:buNone/>
             </a:pPr>
             <a:r>
-              <a:rPr lang="en-US" sz="1500" dirty="0">
+              <a:rPr lang="en-US" sz="1450" dirty="0">
                 <a:solidFill>
                   <a:srgbClr val="CADCFC"/>
                 </a:solidFill>
@@ -7513,40 +7779,40 @@
               </a:rPr>
               <a:t>software-factory-246a.onrender.com</a:t>
             </a:r>
-            <a:endParaRPr lang="en-US" sz="1500" dirty="0"/>
-          </a:p>
-        </p:txBody>
-      </p:sp>
-      <p:sp>
-        <p:nvSpPr>
-          <p:cNvPr id="10" name="Shape 8"/>
-          <p:cNvSpPr/>
-          <p:nvPr/>
-        </p:nvSpPr>
-        <p:spPr>
-          <a:xfrm>
-            <a:off x="640080" y="4846320"/>
-            <a:ext cx="457200" cy="457200"/>
+            <a:endParaRPr lang="en-US" sz="1450" dirty="0"/>
+          </a:p>
+        </p:txBody>
+      </p:sp>
+      <p:sp>
+        <p:nvSpPr>
+          <p:cNvPr id="11" name="Shape 8"/>
+          <p:cNvSpPr/>
+          <p:nvPr/>
+        </p:nvSpPr>
+        <p:spPr>
+          <a:xfrm>
+            <a:off x="640080" y="4974336"/>
+            <a:ext cx="420624" cy="420624"/>
           </a:xfrm>
           <a:prstGeom prst="ellipse">
             <a:avLst/>
           </a:prstGeom>
           <a:solidFill>
-            <a:srgbClr val="1B2742"/>
+            <a:srgbClr val="161D33"/>
           </a:solidFill>
           <a:ln/>
         </p:spPr>
       </p:sp>
       <p:sp>
         <p:nvSpPr>
-          <p:cNvPr id="11" name="Text 9"/>
-          <p:cNvSpPr/>
-          <p:nvPr/>
-        </p:nvSpPr>
-        <p:spPr>
-          <a:xfrm>
-            <a:off x="640080" y="4846320"/>
-            <a:ext cx="457200" cy="457200"/>
+          <p:cNvPr id="12" name="Text 9"/>
+          <p:cNvSpPr/>
+          <p:nvPr/>
+        </p:nvSpPr>
+        <p:spPr>
+          <a:xfrm>
+            <a:off x="640080" y="4974336"/>
+            <a:ext cx="420624" cy="420624"/>
           </a:xfrm>
           <a:prstGeom prst="rect">
             <a:avLst/>
@@ -7562,9 +7828,9 @@
               <a:buNone/>
             </a:pPr>
             <a:r>
-              <a:rPr lang="en-US" sz="1100" b="1" dirty="0">
-                <a:solidFill>
-                  <a:srgbClr val="14B8A6"/>
+              <a:rPr lang="en-US" sz="1012" b="1" dirty="0">
+                <a:solidFill>
+                  <a:srgbClr val="008AFC"/>
                 </a:solidFill>
                 <a:latin typeface="Calibri" pitchFamily="34" charset="0"/>
                 <a:ea typeface="Calibri" pitchFamily="34" charset="-122"/>
@@ -7572,36 +7838,36 @@
               </a:rPr>
               <a:t>↗</a:t>
             </a:r>
-            <a:endParaRPr lang="en-US" sz="1100" dirty="0"/>
-          </a:p>
-        </p:txBody>
-      </p:sp>
-      <p:sp>
-        <p:nvSpPr>
-          <p:cNvPr id="12" name="Text 10"/>
-          <p:cNvSpPr/>
-          <p:nvPr/>
-        </p:nvSpPr>
-        <p:spPr>
-          <a:xfrm>
-            <a:off x="1325880" y="4846320"/>
-            <a:ext cx="10058400" cy="457200"/>
-          </a:xfrm>
-          <a:prstGeom prst="rect">
-            <a:avLst/>
-          </a:prstGeom>
-          <a:noFill/>
-          <a:ln/>
-        </p:spPr>
-        <p:txBody>
-          <a:bodyPr wrap="square" rtlCol="0" anchor="ctr"/>
-          <a:lstStyle/>
-          <a:p>
-            <a:pPr indent="0" marL="0">
-              <a:buNone/>
-            </a:pPr>
-            <a:r>
-              <a:rPr lang="en-US" sz="1500" b="1" dirty="0">
+            <a:endParaRPr lang="en-US" sz="1012" dirty="0"/>
+          </a:p>
+        </p:txBody>
+      </p:sp>
+      <p:sp>
+        <p:nvSpPr>
+          <p:cNvPr id="13" name="Text 10"/>
+          <p:cNvSpPr/>
+          <p:nvPr/>
+        </p:nvSpPr>
+        <p:spPr>
+          <a:xfrm>
+            <a:off x="1280160" y="4974336"/>
+            <a:ext cx="10058400" cy="420624"/>
+          </a:xfrm>
+          <a:prstGeom prst="rect">
+            <a:avLst/>
+          </a:prstGeom>
+          <a:noFill/>
+          <a:ln/>
+        </p:spPr>
+        <p:txBody>
+          <a:bodyPr wrap="square" rtlCol="0" anchor="ctr"/>
+          <a:lstStyle/>
+          <a:p>
+            <a:pPr indent="0" marL="0">
+              <a:buNone/>
+            </a:pPr>
+            <a:r>
+              <a:rPr lang="en-US" sz="1450" b="1" dirty="0">
                 <a:solidFill>
                   <a:srgbClr val="FFFFFF"/>
                 </a:solidFill>
@@ -7615,7 +7881,7 @@
               <a:buNone/>
             </a:pPr>
             <a:r>
-              <a:rPr lang="en-US" sz="1500" dirty="0">
+              <a:rPr lang="en-US" sz="1450" dirty="0">
                 <a:solidFill>
                   <a:srgbClr val="CADCFC"/>
                 </a:solidFill>
@@ -7625,40 +7891,40 @@
               </a:rPr>
               <a:t>github.com/icohangar-ops/software-factory</a:t>
             </a:r>
-            <a:endParaRPr lang="en-US" sz="1500" dirty="0"/>
-          </a:p>
-        </p:txBody>
-      </p:sp>
-      <p:sp>
-        <p:nvSpPr>
-          <p:cNvPr id="13" name="Shape 11"/>
-          <p:cNvSpPr/>
-          <p:nvPr/>
-        </p:nvSpPr>
-        <p:spPr>
-          <a:xfrm>
-            <a:off x="640080" y="5486400"/>
-            <a:ext cx="457200" cy="457200"/>
+            <a:endParaRPr lang="en-US" sz="1450" dirty="0"/>
+          </a:p>
+        </p:txBody>
+      </p:sp>
+      <p:sp>
+        <p:nvSpPr>
+          <p:cNvPr id="14" name="Shape 11"/>
+          <p:cNvSpPr/>
+          <p:nvPr/>
+        </p:nvSpPr>
+        <p:spPr>
+          <a:xfrm>
+            <a:off x="640080" y="5541264"/>
+            <a:ext cx="420624" cy="420624"/>
           </a:xfrm>
           <a:prstGeom prst="ellipse">
             <a:avLst/>
           </a:prstGeom>
           <a:solidFill>
-            <a:srgbClr val="1B2742"/>
+            <a:srgbClr val="161D33"/>
           </a:solidFill>
           <a:ln/>
         </p:spPr>
       </p:sp>
       <p:sp>
         <p:nvSpPr>
-          <p:cNvPr id="14" name="Text 12"/>
-          <p:cNvSpPr/>
-          <p:nvPr/>
-        </p:nvSpPr>
-        <p:spPr>
-          <a:xfrm>
-            <a:off x="640080" y="5486400"/>
-            <a:ext cx="457200" cy="457200"/>
+          <p:cNvPr id="15" name="Text 12"/>
+          <p:cNvSpPr/>
+          <p:nvPr/>
+        </p:nvSpPr>
+        <p:spPr>
+          <a:xfrm>
+            <a:off x="640080" y="5541264"/>
+            <a:ext cx="420624" cy="420624"/>
           </a:xfrm>
           <a:prstGeom prst="rect">
             <a:avLst/>
@@ -7674,9 +7940,9 @@
               <a:buNone/>
             </a:pPr>
             <a:r>
-              <a:rPr lang="en-US" sz="1100" b="1" dirty="0">
-                <a:solidFill>
-                  <a:srgbClr val="14B8A6"/>
+              <a:rPr lang="en-US" sz="1012" b="1" dirty="0">
+                <a:solidFill>
+                  <a:srgbClr val="008AFC"/>
                 </a:solidFill>
                 <a:latin typeface="Calibri" pitchFamily="34" charset="0"/>
                 <a:ea typeface="Calibri" pitchFamily="34" charset="-122"/>
@@ -7684,36 +7950,36 @@
               </a:rPr>
               <a:t>↗</a:t>
             </a:r>
-            <a:endParaRPr lang="en-US" sz="1100" dirty="0"/>
-          </a:p>
-        </p:txBody>
-      </p:sp>
-      <p:sp>
-        <p:nvSpPr>
-          <p:cNvPr id="15" name="Text 13"/>
-          <p:cNvSpPr/>
-          <p:nvPr/>
-        </p:nvSpPr>
-        <p:spPr>
-          <a:xfrm>
-            <a:off x="1325880" y="5486400"/>
-            <a:ext cx="10058400" cy="457200"/>
-          </a:xfrm>
-          <a:prstGeom prst="rect">
-            <a:avLst/>
-          </a:prstGeom>
-          <a:noFill/>
-          <a:ln/>
-        </p:spPr>
-        <p:txBody>
-          <a:bodyPr wrap="square" rtlCol="0" anchor="ctr"/>
-          <a:lstStyle/>
-          <a:p>
-            <a:pPr indent="0" marL="0">
-              <a:buNone/>
-            </a:pPr>
-            <a:r>
-              <a:rPr lang="en-US" sz="1500" b="1" dirty="0">
+            <a:endParaRPr lang="en-US" sz="1012" dirty="0"/>
+          </a:p>
+        </p:txBody>
+      </p:sp>
+      <p:sp>
+        <p:nvSpPr>
+          <p:cNvPr id="16" name="Text 13"/>
+          <p:cNvSpPr/>
+          <p:nvPr/>
+        </p:nvSpPr>
+        <p:spPr>
+          <a:xfrm>
+            <a:off x="1280160" y="5541264"/>
+            <a:ext cx="10058400" cy="420624"/>
+          </a:xfrm>
+          <a:prstGeom prst="rect">
+            <a:avLst/>
+          </a:prstGeom>
+          <a:noFill/>
+          <a:ln/>
+        </p:spPr>
+        <p:txBody>
+          <a:bodyPr wrap="square" rtlCol="0" anchor="ctr"/>
+          <a:lstStyle/>
+          <a:p>
+            <a:pPr indent="0" marL="0">
+              <a:buNone/>
+            </a:pPr>
+            <a:r>
+              <a:rPr lang="en-US" sz="1450" b="1" dirty="0">
                 <a:solidFill>
                   <a:srgbClr val="FFFFFF"/>
                 </a:solidFill>
@@ -7727,7 +7993,7 @@
               <a:buNone/>
             </a:pPr>
             <a:r>
-              <a:rPr lang="en-US" sz="1500" dirty="0">
+              <a:rPr lang="en-US" sz="1450" dirty="0">
                 <a:solidFill>
                   <a:srgbClr val="CADCFC"/>
                 </a:solidFill>
@@ -7737,20 +8003,20 @@
               </a:rPr>
               <a:t>codeberg.org/cubiczan/software-factory</a:t>
             </a:r>
-            <a:endParaRPr lang="en-US" sz="1500" dirty="0"/>
-          </a:p>
-        </p:txBody>
-      </p:sp>
-      <p:sp>
-        <p:nvSpPr>
-          <p:cNvPr id="16" name="Text 14"/>
-          <p:cNvSpPr/>
-          <p:nvPr/>
-        </p:nvSpPr>
-        <p:spPr>
-          <a:xfrm>
-            <a:off x="640080" y="6217920"/>
-            <a:ext cx="10972800" cy="365760"/>
+            <a:endParaRPr lang="en-US" sz="1450" dirty="0"/>
+          </a:p>
+        </p:txBody>
+      </p:sp>
+      <p:sp>
+        <p:nvSpPr>
+          <p:cNvPr id="17" name="Text 14"/>
+          <p:cNvSpPr/>
+          <p:nvPr/>
+        </p:nvSpPr>
+        <p:spPr>
+          <a:xfrm>
+            <a:off x="640080" y="6355080"/>
+            <a:ext cx="10972800" cy="320040"/>
           </a:xfrm>
           <a:prstGeom prst="rect">
             <a:avLst/>
@@ -7774,7 +8040,7 @@
                 <a:ea typeface="Calibri" pitchFamily="34" charset="-122"/>
                 <a:cs typeface="Calibri" pitchFamily="34" charset="-120"/>
               </a:rPr>
-              <a:t>Built with SuperPlane · OpenAI · Daytona · TITO/MAESTRO · Render</a:t>
+              <a:t>Cubiczan · Production-grade, open-source, governed agentic AI · www.cubiczan.com</a:t>
             </a:r>
             <a:endParaRPr lang="en-US" sz="1200" dirty="0"/>
           </a:p>
